--- a/python-course-ppt/逐节课件/Python讲授课件-单元02.pptx
+++ b/python-course-ppt/逐节课件/Python讲授课件-单元02.pptx
@@ -234,1038 +234,6 @@
     </a:lvl9pPr>
   </p:notesStyle>
 </p:notesMaster>
-</file>
-
-<file path=ppt/notesSlides/notesSlide1.xml><?xml version="1.0" encoding="utf-8"?>
-<p:notes xmlns:a="http://schemas.openxmlformats.org/drawingml/2006/main" xmlns:p="http://schemas.openxmlformats.org/presentationml/2006/main" xmlns:r="http://schemas.openxmlformats.org/officeDocument/2006/relationships">
-  <p:cSld>
-    <p:spTree>
-      <p:nvGrpSpPr>
-        <p:cNvPr id="1" name=""/>
-        <p:cNvGrpSpPr/>
-        <p:nvPr/>
-      </p:nvGrpSpPr>
-      <p:grpSpPr>
-        <a:xfrm>
-          <a:off x="0" y="0"/>
-          <a:ext cx="0" cy="0"/>
-          <a:chOff x="0" y="0"/>
-          <a:chExt cx="0" cy="0"/>
-        </a:xfrm>
-      </p:grpSpPr>
-      <p:sp>
-        <p:nvSpPr>
-          <p:cNvPr id="2" name="讲课提示"/>
-          <p:cNvSpPr txBox="1"/>
-          <p:nvPr/>
-        </p:nvSpPr>
-        <p:spPr>
-          <a:xfrm>
-            <a:off x="457200" y="457200"/>
-            <a:ext cx="6858000" cy="4800600"/>
-          </a:xfrm>
-          <a:prstGeom prst="rect">
-            <a:avLst/>
-          </a:prstGeom>
-        </p:spPr>
-        <p:txBody>
-          <a:bodyPr wrap="square"/>
-          <a:lstStyle/>
-          <a:p>
-            <a:r>
-              <a:rPr lang="zh-CN" dirty="0"/>
-              <a:t>单元 2 · 单元 2 · 列表简介</a:t>
-            </a:r>
-          </a:p>
-          <a:p>
-            <a:r>
-              <a:rPr lang="zh-CN" dirty="0"/>
-              <a:t/>
-            </a:r>
-          </a:p>
-          <a:p>
-            <a:r>
-              <a:rPr lang="zh-CN" dirty="0"/>
-              <a:t>本单元包含以下课节：</a:t>
-            </a:r>
-          </a:p>
-          <a:p>
-            <a:r>
-              <a:rPr lang="zh-CN" dirty="0"/>
-              <a:t>· 第 10 节 列表是什么、索引为什么从 0 开始</a:t>
-            </a:r>
-          </a:p>
-          <a:p>
-            <a:r>
-              <a:rPr lang="zh-CN" dirty="0"/>
-              <a:t>· 第 11 节 增删改查、引用共享与排序</a:t>
-            </a:r>
-          </a:p>
-          <a:p>
-            <a:r>
-              <a:rPr lang="zh-CN" dirty="0"/>
-              <a:t>· 第 12 节 动手实战与答案讲评</a:t>
-            </a:r>
-          </a:p>
-          <a:p>
-            <a:r>
-              <a:rPr lang="zh-CN" dirty="0"/>
-              <a:t>· 第 13 节 单元 2 验收复盘</a:t>
-            </a:r>
-          </a:p>
-          <a:p>
-            <a:r>
-              <a:rPr lang="zh-CN" dirty="0"/>
-              <a:t/>
-            </a:r>
-          </a:p>
-          <a:p>
-            <a:r>
-              <a:rPr lang="zh-CN" dirty="0"/>
-              <a:t>开场用 3 分钟讲清：这个单元学完能做出什么，最后会被关卡怎么验。</a:t>
-            </a:r>
-          </a:p>
-        </p:txBody>
-      </p:sp>
-    </p:spTree>
-  </p:cSld>
-  <p:clrMapOvr>
-    <a:masterClrMapping/>
-  </p:clrMapOvr>
-</p:notes>
-</file>
-
-<file path=ppt/notesSlides/notesSlide10.xml><?xml version="1.0" encoding="utf-8"?>
-<p:notes xmlns:a="http://schemas.openxmlformats.org/drawingml/2006/main" xmlns:p="http://schemas.openxmlformats.org/presentationml/2006/main" xmlns:r="http://schemas.openxmlformats.org/officeDocument/2006/relationships">
-  <p:cSld>
-    <p:spTree>
-      <p:nvGrpSpPr>
-        <p:cNvPr id="1" name=""/>
-        <p:cNvGrpSpPr/>
-        <p:nvPr/>
-      </p:nvGrpSpPr>
-      <p:grpSpPr>
-        <a:xfrm>
-          <a:off x="0" y="0"/>
-          <a:ext cx="0" cy="0"/>
-          <a:chOff x="0" y="0"/>
-          <a:chExt cx="0" cy="0"/>
-        </a:xfrm>
-      </p:grpSpPr>
-      <p:sp>
-        <p:nvSpPr>
-          <p:cNvPr id="2" name="讲课提示"/>
-          <p:cNvSpPr txBox="1"/>
-          <p:nvPr/>
-        </p:nvSpPr>
-        <p:spPr>
-          <a:xfrm>
-            <a:off x="457200" y="457200"/>
-            <a:ext cx="6858000" cy="4800600"/>
-          </a:xfrm>
-          <a:prstGeom prst="rect">
-            <a:avLst/>
-          </a:prstGeom>
-        </p:spPr>
-        <p:txBody>
-          <a:bodyPr wrap="square"/>
-          <a:lstStyle/>
-          <a:p>
-            <a:r>
-              <a:rPr lang="zh-CN" dirty="0"/>
-              <a:t>单元 2 小结 · 单元 2 · 小结</a:t>
-            </a:r>
-          </a:p>
-          <a:p>
-            <a:r>
-              <a:rPr lang="zh-CN" dirty="0"/>
-              <a:t/>
-            </a:r>
-          </a:p>
-          <a:p>
-            <a:r>
-              <a:rPr lang="zh-CN" dirty="0"/>
-              <a:t>收尾动作：让学生合上讲义，口述本单元三个最重要的结论；说不出来的，回对应课节。</a:t>
-            </a:r>
-          </a:p>
-          <a:p>
-            <a:r>
-              <a:rPr lang="zh-CN" dirty="0"/>
-              <a:t>然后当场勾一遍本单元课节的「已完成」，没打勾的进下一单元前补掉。</a:t>
-            </a:r>
-          </a:p>
-        </p:txBody>
-      </p:sp>
-    </p:spTree>
-  </p:cSld>
-  <p:clrMapOvr>
-    <a:masterClrMapping/>
-  </p:clrMapOvr>
-</p:notes>
-</file>
-
-<file path=ppt/notesSlides/notesSlide2.xml><?xml version="1.0" encoding="utf-8"?>
-<p:notes xmlns:a="http://schemas.openxmlformats.org/drawingml/2006/main" xmlns:p="http://schemas.openxmlformats.org/presentationml/2006/main" xmlns:r="http://schemas.openxmlformats.org/officeDocument/2006/relationships">
-  <p:cSld>
-    <p:spTree>
-      <p:nvGrpSpPr>
-        <p:cNvPr id="1" name=""/>
-        <p:cNvGrpSpPr/>
-        <p:nvPr/>
-      </p:nvGrpSpPr>
-      <p:grpSpPr>
-        <a:xfrm>
-          <a:off x="0" y="0"/>
-          <a:ext cx="0" cy="0"/>
-          <a:chOff x="0" y="0"/>
-          <a:chExt cx="0" cy="0"/>
-        </a:xfrm>
-      </p:grpSpPr>
-      <p:sp>
-        <p:nvSpPr>
-          <p:cNvPr id="2" name="讲课提示"/>
-          <p:cNvSpPr txBox="1"/>
-          <p:nvPr/>
-        </p:nvSpPr>
-        <p:spPr>
-          <a:xfrm>
-            <a:off x="457200" y="457200"/>
-            <a:ext cx="6858000" cy="4800600"/>
-          </a:xfrm>
-          <a:prstGeom prst="rect">
-            <a:avLst/>
-          </a:prstGeom>
-        </p:spPr>
-        <p:txBody>
-          <a:bodyPr wrap="square"/>
-          <a:lstStyle/>
-          <a:p>
-            <a:r>
-              <a:rPr lang="zh-CN" dirty="0"/>
-              <a:t>第 10 节 · 列表是什么、索引为什么从 0 开始</a:t>
-            </a:r>
-          </a:p>
-          <a:p>
-            <a:r>
-              <a:rPr lang="zh-CN" dirty="0"/>
-              <a:t>单元 2 · 列表简介 · W2</a:t>
-            </a:r>
-          </a:p>
-          <a:p>
-            <a:r>
-              <a:rPr lang="zh-CN" dirty="0"/>
-              <a:t/>
-            </a:r>
-          </a:p>
-          <a:p>
-            <a:r>
-              <a:rPr lang="zh-CN" dirty="0"/>
-              <a:t>学习目标：理解「一排抽屉」模型，牢记索引从 0 开始与负索引</a:t>
-            </a:r>
-          </a:p>
-          <a:p>
-            <a:r>
-              <a:rPr lang="zh-CN" dirty="0"/>
-              <a:t/>
-            </a:r>
-          </a:p>
-          <a:p>
-            <a:r>
-              <a:rPr lang="zh-CN" dirty="0"/>
-              <a:t>课堂实操（40 分钟，不看答案）：</a:t>
-            </a:r>
-          </a:p>
-          <a:p>
-            <a:r>
-              <a:rPr lang="zh-CN" dirty="0"/>
-              <a:t>· 画一个列表并标出每个元素的下标</a:t>
-            </a:r>
-          </a:p>
-          <a:p>
-            <a:r>
-              <a:rPr lang="zh-CN" dirty="0"/>
-              <a:t>· 用负索引取最后三个元素</a:t>
-            </a:r>
-          </a:p>
-          <a:p>
-            <a:r>
-              <a:rPr lang="zh-CN" dirty="0"/>
-              <a:t/>
-            </a:r>
-          </a:p>
-          <a:p>
-            <a:r>
-              <a:rPr lang="zh-CN" dirty="0"/>
-              <a:t>课后作业：</a:t>
-            </a:r>
-          </a:p>
-          <a:p>
-            <a:r>
-              <a:rPr lang="zh-CN" dirty="0"/>
-              <a:t>· 完成动手练习 2-1 ~ 2-2</a:t>
-            </a:r>
-          </a:p>
-          <a:p>
-            <a:r>
-              <a:rPr lang="zh-CN" dirty="0"/>
-              <a:t/>
-            </a:r>
-          </a:p>
-          <a:p>
-            <a:r>
-              <a:rPr lang="zh-CN" dirty="0"/>
-              <a:t>节奏：讲 20 分钟 → 学员自己敲 40 分钟（不看答案）→ 对讲评自查 20 分钟 → 写作业 10 分钟。</a:t>
-            </a:r>
-          </a:p>
-        </p:txBody>
-      </p:sp>
-    </p:spTree>
-  </p:cSld>
-  <p:clrMapOvr>
-    <a:masterClrMapping/>
-  </p:clrMapOvr>
-</p:notes>
-</file>
-
-<file path=ppt/notesSlides/notesSlide3.xml><?xml version="1.0" encoding="utf-8"?>
-<p:notes xmlns:a="http://schemas.openxmlformats.org/drawingml/2006/main" xmlns:p="http://schemas.openxmlformats.org/presentationml/2006/main" xmlns:r="http://schemas.openxmlformats.org/officeDocument/2006/relationships">
-  <p:cSld>
-    <p:spTree>
-      <p:nvGrpSpPr>
-        <p:cNvPr id="1" name=""/>
-        <p:cNvGrpSpPr/>
-        <p:nvPr/>
-      </p:nvGrpSpPr>
-      <p:grpSpPr>
-        <a:xfrm>
-          <a:off x="0" y="0"/>
-          <a:ext cx="0" cy="0"/>
-          <a:chOff x="0" y="0"/>
-          <a:chExt cx="0" cy="0"/>
-        </a:xfrm>
-      </p:grpSpPr>
-      <p:sp>
-        <p:nvSpPr>
-          <p:cNvPr id="2" name="讲课提示"/>
-          <p:cNvSpPr txBox="1"/>
-          <p:nvPr/>
-        </p:nvSpPr>
-        <p:spPr>
-          <a:xfrm>
-            <a:off x="457200" y="457200"/>
-            <a:ext cx="6858000" cy="4800600"/>
-          </a:xfrm>
-          <a:prstGeom prst="rect">
-            <a:avLst/>
-          </a:prstGeom>
-        </p:spPr>
-        <p:txBody>
-          <a:bodyPr wrap="square"/>
-          <a:lstStyle/>
-          <a:p>
-            <a:r>
-              <a:rPr lang="zh-CN" dirty="0"/>
-              <a:t>第 10 节 · 核心知识点：列表是什么、索引为什么从 0 开始</a:t>
-            </a:r>
-          </a:p>
-          <a:p>
-            <a:r>
-              <a:rPr lang="zh-CN" dirty="0"/>
-              <a:t/>
-            </a:r>
-          </a:p>
-          <a:p>
-            <a:r>
-              <a:rPr lang="zh-CN" dirty="0"/>
-              <a:t>讲这一页时：先让学生说出上节课的结论，再逐块讲要点。</a:t>
-            </a:r>
-          </a:p>
-          <a:p>
-            <a:r>
-              <a:rPr lang="zh-CN" dirty="0"/>
-              <a:t>每讲完一块，问一句「这一步如果写错了，报错会长什么样？」——把错误提前讲。</a:t>
-            </a:r>
-          </a:p>
-          <a:p>
-            <a:r>
-              <a:rPr lang="zh-CN" dirty="0"/>
-              <a:t/>
-            </a:r>
-          </a:p>
-          <a:p>
-            <a:r>
-              <a:rPr lang="zh-CN" dirty="0"/>
-              <a:t>本节目标：理解「一排抽屉」模型，牢记索引从 0 开始与负索引</a:t>
-            </a:r>
-          </a:p>
-          <a:p>
-            <a:r>
-              <a:rPr lang="zh-CN" dirty="0"/>
-              <a:t/>
-            </a:r>
-          </a:p>
-          <a:p>
-            <a:r>
-              <a:rPr lang="zh-CN" dirty="0"/>
-              <a:t>看不到懂的地方，回讲义对应小节读一遍，再回来对着这页复述一次——能讲出来才算真懂。</a:t>
-            </a:r>
-          </a:p>
-        </p:txBody>
-      </p:sp>
-    </p:spTree>
-  </p:cSld>
-  <p:clrMapOvr>
-    <a:masterClrMapping/>
-  </p:clrMapOvr>
-</p:notes>
-</file>
-
-<file path=ppt/notesSlides/notesSlide4.xml><?xml version="1.0" encoding="utf-8"?>
-<p:notes xmlns:a="http://schemas.openxmlformats.org/drawingml/2006/main" xmlns:p="http://schemas.openxmlformats.org/presentationml/2006/main" xmlns:r="http://schemas.openxmlformats.org/officeDocument/2006/relationships">
-  <p:cSld>
-    <p:spTree>
-      <p:nvGrpSpPr>
-        <p:cNvPr id="1" name=""/>
-        <p:cNvGrpSpPr/>
-        <p:nvPr/>
-      </p:nvGrpSpPr>
-      <p:grpSpPr>
-        <a:xfrm>
-          <a:off x="0" y="0"/>
-          <a:ext cx="0" cy="0"/>
-          <a:chOff x="0" y="0"/>
-          <a:chExt cx="0" cy="0"/>
-        </a:xfrm>
-      </p:grpSpPr>
-      <p:sp>
-        <p:nvSpPr>
-          <p:cNvPr id="2" name="讲课提示"/>
-          <p:cNvSpPr txBox="1"/>
-          <p:nvPr/>
-        </p:nvSpPr>
-        <p:spPr>
-          <a:xfrm>
-            <a:off x="457200" y="457200"/>
-            <a:ext cx="6858000" cy="4800600"/>
-          </a:xfrm>
-          <a:prstGeom prst="rect">
-            <a:avLst/>
-          </a:prstGeom>
-        </p:spPr>
-        <p:txBody>
-          <a:bodyPr wrap="square"/>
-          <a:lstStyle/>
-          <a:p>
-            <a:r>
-              <a:rPr lang="zh-CN" dirty="0"/>
-              <a:t>第 11 节 · 增删改查、引用共享与排序</a:t>
-            </a:r>
-          </a:p>
-          <a:p>
-            <a:r>
-              <a:rPr lang="zh-CN" dirty="0"/>
-              <a:t>单元 2 · 列表简介 · W2</a:t>
-            </a:r>
-          </a:p>
-          <a:p>
-            <a:r>
-              <a:rPr lang="zh-CN" dirty="0"/>
-              <a:t/>
-            </a:r>
-          </a:p>
-          <a:p>
-            <a:r>
-              <a:rPr lang="zh-CN" dirty="0"/>
-              <a:t>学习目标：掌握五个增删改方法；理解引用共享——本单元最反直觉的一课</a:t>
-            </a:r>
-          </a:p>
-          <a:p>
-            <a:r>
-              <a:rPr lang="zh-CN" dirty="0"/>
-              <a:t/>
-            </a:r>
-          </a:p>
-          <a:p>
-            <a:r>
-              <a:rPr lang="zh-CN" dirty="0"/>
-              <a:t>课堂实操（40 分钟，不看答案）：</a:t>
-            </a:r>
-          </a:p>
-          <a:p>
-            <a:r>
-              <a:rPr lang="zh-CN" dirty="0"/>
-              <a:t>· ★ 现场演示 a = b[:] 与 a = b 的区别</a:t>
-            </a:r>
-          </a:p>
-          <a:p>
-            <a:r>
-              <a:rPr lang="zh-CN" dirty="0"/>
-              <a:t>· 对同一列表做 20 次增删改排序操作</a:t>
-            </a:r>
-          </a:p>
-          <a:p>
-            <a:r>
-              <a:rPr lang="zh-CN" dirty="0"/>
-              <a:t/>
-            </a:r>
-          </a:p>
-          <a:p>
-            <a:r>
-              <a:rPr lang="zh-CN" dirty="0"/>
-              <a:t>课后作业：</a:t>
-            </a:r>
-          </a:p>
-          <a:p>
-            <a:r>
-              <a:rPr lang="zh-CN" dirty="0"/>
-              <a:t>· 完成动手练习进阶档 2-3 ~ 2-8</a:t>
-            </a:r>
-          </a:p>
-          <a:p>
-            <a:r>
-              <a:rPr lang="zh-CN" dirty="0"/>
-              <a:t/>
-            </a:r>
-          </a:p>
-          <a:p>
-            <a:r>
-              <a:rPr lang="zh-CN" dirty="0"/>
-              <a:t>节奏：讲 20 分钟 → 学员自己敲 40 分钟（不看答案）→ 对讲评自查 20 分钟 → 写作业 10 分钟。</a:t>
-            </a:r>
-          </a:p>
-        </p:txBody>
-      </p:sp>
-    </p:spTree>
-  </p:cSld>
-  <p:clrMapOvr>
-    <a:masterClrMapping/>
-  </p:clrMapOvr>
-</p:notes>
-</file>
-
-<file path=ppt/notesSlides/notesSlide5.xml><?xml version="1.0" encoding="utf-8"?>
-<p:notes xmlns:a="http://schemas.openxmlformats.org/drawingml/2006/main" xmlns:p="http://schemas.openxmlformats.org/presentationml/2006/main" xmlns:r="http://schemas.openxmlformats.org/officeDocument/2006/relationships">
-  <p:cSld>
-    <p:spTree>
-      <p:nvGrpSpPr>
-        <p:cNvPr id="1" name=""/>
-        <p:cNvGrpSpPr/>
-        <p:nvPr/>
-      </p:nvGrpSpPr>
-      <p:grpSpPr>
-        <a:xfrm>
-          <a:off x="0" y="0"/>
-          <a:ext cx="0" cy="0"/>
-          <a:chOff x="0" y="0"/>
-          <a:chExt cx="0" cy="0"/>
-        </a:xfrm>
-      </p:grpSpPr>
-      <p:sp>
-        <p:nvSpPr>
-          <p:cNvPr id="2" name="讲课提示"/>
-          <p:cNvSpPr txBox="1"/>
-          <p:nvPr/>
-        </p:nvSpPr>
-        <p:spPr>
-          <a:xfrm>
-            <a:off x="457200" y="457200"/>
-            <a:ext cx="6858000" cy="4800600"/>
-          </a:xfrm>
-          <a:prstGeom prst="rect">
-            <a:avLst/>
-          </a:prstGeom>
-        </p:spPr>
-        <p:txBody>
-          <a:bodyPr wrap="square"/>
-          <a:lstStyle/>
-          <a:p>
-            <a:r>
-              <a:rPr lang="zh-CN" dirty="0"/>
-              <a:t>第 11 节 · 核心知识点：增删改查、引用共享与排序</a:t>
-            </a:r>
-          </a:p>
-          <a:p>
-            <a:r>
-              <a:rPr lang="zh-CN" dirty="0"/>
-              <a:t/>
-            </a:r>
-          </a:p>
-          <a:p>
-            <a:r>
-              <a:rPr lang="zh-CN" dirty="0"/>
-              <a:t>讲这一页时：先让学生说出上节课的结论，再逐块讲要点。</a:t>
-            </a:r>
-          </a:p>
-          <a:p>
-            <a:r>
-              <a:rPr lang="zh-CN" dirty="0"/>
-              <a:t>每讲完一块，问一句「这一步如果写错了，报错会长什么样？」——把错误提前讲。</a:t>
-            </a:r>
-          </a:p>
-          <a:p>
-            <a:r>
-              <a:rPr lang="zh-CN" dirty="0"/>
-              <a:t/>
-            </a:r>
-          </a:p>
-          <a:p>
-            <a:r>
-              <a:rPr lang="zh-CN" dirty="0"/>
-              <a:t>本节目标：掌握五个增删改方法；理解引用共享——本单元最反直觉的一课</a:t>
-            </a:r>
-          </a:p>
-          <a:p>
-            <a:r>
-              <a:rPr lang="zh-CN" dirty="0"/>
-              <a:t/>
-            </a:r>
-          </a:p>
-          <a:p>
-            <a:r>
-              <a:rPr lang="zh-CN" dirty="0"/>
-              <a:t>看不到懂的地方，回讲义对应小节读一遍，再回来对着这页复述一次——能讲出来才算真懂。</a:t>
-            </a:r>
-          </a:p>
-        </p:txBody>
-      </p:sp>
-    </p:spTree>
-  </p:cSld>
-  <p:clrMapOvr>
-    <a:masterClrMapping/>
-  </p:clrMapOvr>
-</p:notes>
-</file>
-
-<file path=ppt/notesSlides/notesSlide6.xml><?xml version="1.0" encoding="utf-8"?>
-<p:notes xmlns:a="http://schemas.openxmlformats.org/drawingml/2006/main" xmlns:p="http://schemas.openxmlformats.org/presentationml/2006/main" xmlns:r="http://schemas.openxmlformats.org/officeDocument/2006/relationships">
-  <p:cSld>
-    <p:spTree>
-      <p:nvGrpSpPr>
-        <p:cNvPr id="1" name=""/>
-        <p:cNvGrpSpPr/>
-        <p:nvPr/>
-      </p:nvGrpSpPr>
-      <p:grpSpPr>
-        <a:xfrm>
-          <a:off x="0" y="0"/>
-          <a:ext cx="0" cy="0"/>
-          <a:chOff x="0" y="0"/>
-          <a:chExt cx="0" cy="0"/>
-        </a:xfrm>
-      </p:grpSpPr>
-      <p:sp>
-        <p:nvSpPr>
-          <p:cNvPr id="2" name="讲课提示"/>
-          <p:cNvSpPr txBox="1"/>
-          <p:nvPr/>
-        </p:nvSpPr>
-        <p:spPr>
-          <a:xfrm>
-            <a:off x="457200" y="457200"/>
-            <a:ext cx="6858000" cy="4800600"/>
-          </a:xfrm>
-          <a:prstGeom prst="rect">
-            <a:avLst/>
-          </a:prstGeom>
-        </p:spPr>
-        <p:txBody>
-          <a:bodyPr wrap="square"/>
-          <a:lstStyle/>
-          <a:p>
-            <a:r>
-              <a:rPr lang="zh-CN" dirty="0"/>
-              <a:t>第 12 节 · 动手实战与答案讲评</a:t>
-            </a:r>
-          </a:p>
-          <a:p>
-            <a:r>
-              <a:rPr lang="zh-CN" dirty="0"/>
-              <a:t>单元 2 · 列表简介 · W2</a:t>
-            </a:r>
-          </a:p>
-          <a:p>
-            <a:r>
-              <a:rPr lang="zh-CN" dirty="0"/>
-              <a:t/>
-            </a:r>
-          </a:p>
-          <a:p>
-            <a:r>
-              <a:rPr lang="zh-CN" dirty="0"/>
-              <a:t>学习目标：独立完成单元 2 练习，能预测任意列表操作的结果</a:t>
-            </a:r>
-          </a:p>
-          <a:p>
-            <a:r>
-              <a:rPr lang="zh-CN" dirty="0"/>
-              <a:t/>
-            </a:r>
-          </a:p>
-          <a:p>
-            <a:r>
-              <a:rPr lang="zh-CN" dirty="0"/>
-              <a:t>课堂实操（40 分钟，不看答案）：</a:t>
-            </a:r>
-          </a:p>
-          <a:p>
-            <a:r>
-              <a:rPr lang="zh-CN" dirty="0"/>
-              <a:t>· 限时 25 分钟独立完成基础档</a:t>
-            </a:r>
-          </a:p>
-          <a:p>
-            <a:r>
-              <a:rPr lang="zh-CN" dirty="0"/>
-              <a:t>· 逐题对照答案，错的当场重跑</a:t>
-            </a:r>
-          </a:p>
-          <a:p>
-            <a:r>
-              <a:rPr lang="zh-CN" dirty="0"/>
-              <a:t/>
-            </a:r>
-          </a:p>
-          <a:p>
-            <a:r>
-              <a:rPr lang="zh-CN" dirty="0"/>
-              <a:t>课后作业：</a:t>
-            </a:r>
-          </a:p>
-          <a:p>
-            <a:r>
-              <a:rPr lang="zh-CN" dirty="0"/>
-              <a:t>· 产出：能增删改查排序的清单脚本</a:t>
-            </a:r>
-          </a:p>
-          <a:p>
-            <a:r>
-              <a:rPr lang="zh-CN" dirty="0"/>
-              <a:t/>
-            </a:r>
-          </a:p>
-          <a:p>
-            <a:r>
-              <a:rPr lang="zh-CN" dirty="0"/>
-              <a:t>节奏：讲 20 分钟 → 学员自己敲 40 分钟（不看答案）→ 对讲评自查 20 分钟 → 写作业 10 分钟。</a:t>
-            </a:r>
-          </a:p>
-        </p:txBody>
-      </p:sp>
-    </p:spTree>
-  </p:cSld>
-  <p:clrMapOvr>
-    <a:masterClrMapping/>
-  </p:clrMapOvr>
-</p:notes>
-</file>
-
-<file path=ppt/notesSlides/notesSlide7.xml><?xml version="1.0" encoding="utf-8"?>
-<p:notes xmlns:a="http://schemas.openxmlformats.org/drawingml/2006/main" xmlns:p="http://schemas.openxmlformats.org/presentationml/2006/main" xmlns:r="http://schemas.openxmlformats.org/officeDocument/2006/relationships">
-  <p:cSld>
-    <p:spTree>
-      <p:nvGrpSpPr>
-        <p:cNvPr id="1" name=""/>
-        <p:cNvGrpSpPr/>
-        <p:nvPr/>
-      </p:nvGrpSpPr>
-      <p:grpSpPr>
-        <a:xfrm>
-          <a:off x="0" y="0"/>
-          <a:ext cx="0" cy="0"/>
-          <a:chOff x="0" y="0"/>
-          <a:chExt cx="0" cy="0"/>
-        </a:xfrm>
-      </p:grpSpPr>
-      <p:sp>
-        <p:nvSpPr>
-          <p:cNvPr id="2" name="讲课提示"/>
-          <p:cNvSpPr txBox="1"/>
-          <p:nvPr/>
-        </p:nvSpPr>
-        <p:spPr>
-          <a:xfrm>
-            <a:off x="457200" y="457200"/>
-            <a:ext cx="6858000" cy="4800600"/>
-          </a:xfrm>
-          <a:prstGeom prst="rect">
-            <a:avLst/>
-          </a:prstGeom>
-        </p:spPr>
-        <p:txBody>
-          <a:bodyPr wrap="square"/>
-          <a:lstStyle/>
-          <a:p>
-            <a:r>
-              <a:rPr lang="zh-CN" dirty="0"/>
-              <a:t>第 12 节 · 核心知识点：动手实战与答案讲评</a:t>
-            </a:r>
-          </a:p>
-          <a:p>
-            <a:r>
-              <a:rPr lang="zh-CN" dirty="0"/>
-              <a:t/>
-            </a:r>
-          </a:p>
-          <a:p>
-            <a:r>
-              <a:rPr lang="zh-CN" dirty="0"/>
-              <a:t>讲这一页时：先让学生说出上节课的结论，再逐块讲要点。</a:t>
-            </a:r>
-          </a:p>
-          <a:p>
-            <a:r>
-              <a:rPr lang="zh-CN" dirty="0"/>
-              <a:t>每讲完一块，问一句「这一步如果写错了，报错会长什么样？」——把错误提前讲。</a:t>
-            </a:r>
-          </a:p>
-          <a:p>
-            <a:r>
-              <a:rPr lang="zh-CN" dirty="0"/>
-              <a:t/>
-            </a:r>
-          </a:p>
-          <a:p>
-            <a:r>
-              <a:rPr lang="zh-CN" dirty="0"/>
-              <a:t>本节目标：独立完成单元 2 练习，能预测任意列表操作的结果</a:t>
-            </a:r>
-          </a:p>
-          <a:p>
-            <a:r>
-              <a:rPr lang="zh-CN" dirty="0"/>
-              <a:t/>
-            </a:r>
-          </a:p>
-          <a:p>
-            <a:r>
-              <a:rPr lang="zh-CN" dirty="0"/>
-              <a:t>看不到懂的地方，回讲义对应小节读一遍，再回来对着这页复述一次——能讲出来才算真懂。</a:t>
-            </a:r>
-          </a:p>
-        </p:txBody>
-      </p:sp>
-    </p:spTree>
-  </p:cSld>
-  <p:clrMapOvr>
-    <a:masterClrMapping/>
-  </p:clrMapOvr>
-</p:notes>
-</file>
-
-<file path=ppt/notesSlides/notesSlide8.xml><?xml version="1.0" encoding="utf-8"?>
-<p:notes xmlns:a="http://schemas.openxmlformats.org/drawingml/2006/main" xmlns:p="http://schemas.openxmlformats.org/presentationml/2006/main" xmlns:r="http://schemas.openxmlformats.org/officeDocument/2006/relationships">
-  <p:cSld>
-    <p:spTree>
-      <p:nvGrpSpPr>
-        <p:cNvPr id="1" name=""/>
-        <p:cNvGrpSpPr/>
-        <p:nvPr/>
-      </p:nvGrpSpPr>
-      <p:grpSpPr>
-        <a:xfrm>
-          <a:off x="0" y="0"/>
-          <a:ext cx="0" cy="0"/>
-          <a:chOff x="0" y="0"/>
-          <a:chExt cx="0" cy="0"/>
-        </a:xfrm>
-      </p:grpSpPr>
-      <p:sp>
-        <p:nvSpPr>
-          <p:cNvPr id="2" name="讲课提示"/>
-          <p:cNvSpPr txBox="1"/>
-          <p:nvPr/>
-        </p:nvSpPr>
-        <p:spPr>
-          <a:xfrm>
-            <a:off x="457200" y="457200"/>
-            <a:ext cx="6858000" cy="4800600"/>
-          </a:xfrm>
-          <a:prstGeom prst="rect">
-            <a:avLst/>
-          </a:prstGeom>
-        </p:spPr>
-        <p:txBody>
-          <a:bodyPr wrap="square"/>
-          <a:lstStyle/>
-          <a:p>
-            <a:r>
-              <a:rPr lang="zh-CN" dirty="0"/>
-              <a:t>第 13 节 · 单元 2 验收复盘</a:t>
-            </a:r>
-          </a:p>
-          <a:p>
-            <a:r>
-              <a:rPr lang="zh-CN" dirty="0"/>
-              <a:t>单元 2 · 列表简介 · W2</a:t>
-            </a:r>
-          </a:p>
-          <a:p>
-            <a:r>
-              <a:rPr lang="zh-CN" dirty="0"/>
-              <a:t/>
-            </a:r>
-          </a:p>
-          <a:p>
-            <a:r>
-              <a:rPr lang="zh-CN" dirty="0"/>
-              <a:t>学习目标：确认增删改查、引用共享、排序都过关</a:t>
-            </a:r>
-          </a:p>
-          <a:p>
-            <a:r>
-              <a:rPr lang="zh-CN" dirty="0"/>
-              <a:t/>
-            </a:r>
-          </a:p>
-          <a:p>
-            <a:r>
-              <a:rPr lang="zh-CN" dirty="0"/>
-              <a:t>课堂实操（40 分钟，不看答案）：</a:t>
-            </a:r>
-          </a:p>
-          <a:p>
-            <a:r>
-              <a:rPr lang="zh-CN" dirty="0"/>
-              <a:t>· 逐条打勾验收自测</a:t>
-            </a:r>
-          </a:p>
-          <a:p>
-            <a:r>
-              <a:rPr lang="zh-CN" dirty="0"/>
-              <a:t>· 现场演示引用共享的坑</a:t>
-            </a:r>
-          </a:p>
-          <a:p>
-            <a:r>
-              <a:rPr lang="zh-CN" dirty="0"/>
-              <a:t/>
-            </a:r>
-          </a:p>
-          <a:p>
-            <a:r>
-              <a:rPr lang="zh-CN" dirty="0"/>
-              <a:t>课后作业：</a:t>
-            </a:r>
-          </a:p>
-          <a:p>
-            <a:r>
-              <a:rPr lang="zh-CN" dirty="0"/>
-              <a:t>· 完成本单元小结与产出检查</a:t>
-            </a:r>
-          </a:p>
-          <a:p>
-            <a:r>
-              <a:rPr lang="zh-CN" dirty="0"/>
-              <a:t/>
-            </a:r>
-          </a:p>
-          <a:p>
-            <a:r>
-              <a:rPr lang="zh-CN" dirty="0"/>
-              <a:t>节奏：讲 20 分钟 → 学员自己敲 40 分钟（不看答案）→ 对讲评自查 20 分钟 → 写作业 10 分钟。</a:t>
-            </a:r>
-          </a:p>
-        </p:txBody>
-      </p:sp>
-    </p:spTree>
-  </p:cSld>
-  <p:clrMapOvr>
-    <a:masterClrMapping/>
-  </p:clrMapOvr>
-</p:notes>
-</file>
-
-<file path=ppt/notesSlides/notesSlide9.xml><?xml version="1.0" encoding="utf-8"?>
-<p:notes xmlns:a="http://schemas.openxmlformats.org/drawingml/2006/main" xmlns:p="http://schemas.openxmlformats.org/presentationml/2006/main" xmlns:r="http://schemas.openxmlformats.org/officeDocument/2006/relationships">
-  <p:cSld>
-    <p:spTree>
-      <p:nvGrpSpPr>
-        <p:cNvPr id="1" name=""/>
-        <p:cNvGrpSpPr/>
-        <p:nvPr/>
-      </p:nvGrpSpPr>
-      <p:grpSpPr>
-        <a:xfrm>
-          <a:off x="0" y="0"/>
-          <a:ext cx="0" cy="0"/>
-          <a:chOff x="0" y="0"/>
-          <a:chExt cx="0" cy="0"/>
-        </a:xfrm>
-      </p:grpSpPr>
-      <p:sp>
-        <p:nvSpPr>
-          <p:cNvPr id="2" name="讲课提示"/>
-          <p:cNvSpPr txBox="1"/>
-          <p:nvPr/>
-        </p:nvSpPr>
-        <p:spPr>
-          <a:xfrm>
-            <a:off x="457200" y="457200"/>
-            <a:ext cx="6858000" cy="4800600"/>
-          </a:xfrm>
-          <a:prstGeom prst="rect">
-            <a:avLst/>
-          </a:prstGeom>
-        </p:spPr>
-        <p:txBody>
-          <a:bodyPr wrap="square"/>
-          <a:lstStyle/>
-          <a:p>
-            <a:r>
-              <a:rPr lang="zh-CN" dirty="0"/>
-              <a:t>第 13 节 · 核心知识点：单元 2 验收复盘</a:t>
-            </a:r>
-          </a:p>
-          <a:p>
-            <a:r>
-              <a:rPr lang="zh-CN" dirty="0"/>
-              <a:t/>
-            </a:r>
-          </a:p>
-          <a:p>
-            <a:r>
-              <a:rPr lang="zh-CN" dirty="0"/>
-              <a:t>讲这一页时：先让学生说出上节课的结论，再逐块讲要点。</a:t>
-            </a:r>
-          </a:p>
-          <a:p>
-            <a:r>
-              <a:rPr lang="zh-CN" dirty="0"/>
-              <a:t>每讲完一块，问一句「这一步如果写错了，报错会长什么样？」——把错误提前讲。</a:t>
-            </a:r>
-          </a:p>
-          <a:p>
-            <a:r>
-              <a:rPr lang="zh-CN" dirty="0"/>
-              <a:t/>
-            </a:r>
-          </a:p>
-          <a:p>
-            <a:r>
-              <a:rPr lang="zh-CN" dirty="0"/>
-              <a:t>本节目标：确认增删改查、引用共享、排序都过关</a:t>
-            </a:r>
-          </a:p>
-          <a:p>
-            <a:r>
-              <a:rPr lang="zh-CN" dirty="0"/>
-              <a:t/>
-            </a:r>
-          </a:p>
-          <a:p>
-            <a:r>
-              <a:rPr lang="zh-CN" dirty="0"/>
-              <a:t>看不到懂的地方，回讲义对应小节读一遍，再回来对着这页复述一次——能讲出来才算真懂。</a:t>
-            </a:r>
-          </a:p>
-        </p:txBody>
-      </p:sp>
-    </p:spTree>
-  </p:cSld>
-  <p:clrMapOvr>
-    <a:masterClrMapping/>
-  </p:clrMapOvr>
-</p:notes>
 </file>
 
 <file path=ppt/slideLayouts/slideLayout1.xml><?xml version="1.0" encoding="utf-8"?>

--- a/python-course-ppt/逐节课件/Python讲授课件-单元02.pptx
+++ b/python-course-ppt/逐节课件/Python讲授课件-单元02.pptx
@@ -1677,7 +1677,7 @@
   <p:cSld>
     <p:spTree>
       <p:nvGrpSpPr>
-        <p:cNvPr id="29" name="" descr="&lt;Slide style={{ width: '1280px', height: '720px', backgroundColor: '#FAFCFE', padding: 0, position: 'relative', overflow: 'hidden' }}&gt;&#13;&#10;    &lt;Box style={{ position: 'absolute', left: 64, top: 36, width: '1152px', flexDirection: 'row', alignItems: 'center', gap: 12 }}&gt;&#13;&#10;        &lt;Box style={{ background: '#0E9B78', borderRadius: 5, padding: '3px 11px' }}&gt;&#13;&#10;            &lt;Text style={{ fontSize: 14, fontWeight: 'bold', color: '#FFFFFF' }}&gt;第 10 节&lt;/Text&gt;&#13;&#10;        &lt;/Box&gt;&#13;&#10;        &lt;Text style={{ fontSize: 30, fontWeight: 'bold', color: '#16232E' }}&gt;核心知识点&lt;/Text&gt;&#13;&#10;        &lt;Text style={{ fontSize: 15, color: '#5A6B7A', marginTop: 10 }}&gt;· 列表是什么、索引为什么从 0 开始&lt;/Text&gt;&#13;&#10;    &lt;/Box&gt;&#13;&#10;    &lt;Box style={{ position: 'absolute', left: 0, top: 0, width: '1280px', height: '720px' }}&gt;&#13;&#10;        &lt;svg width='1280' height='720' viewBox='0 0 1280 720'&gt;&#13;&#10;            &lt;rect x='64' y='96' width='368' height='330' rx='12' fill='#FFFFFF' stroke='#D8E3EE' /&gt;&lt;rect x='64' y='96' width='368' height='4' rx='2' fill='#1F5FA8' /&gt;&lt;text x='82' y='130' fontSize='15.5' fontWeight='bold' fill='#1F5FA8' textAnchor='start' fontFamily='Microsoft YaHei'&gt;2.1 列表：一个名字，一排抽屉&lt;/text&gt;&lt;text x='82' y='169.0' fontSize='13' fill='#3A4A58' textAnchor='start' fontFamily='Microsoft YaHei'&gt;· 到目前为止，变量只能装一个值。但现实中数据总是成组&lt;/text&gt;&lt;text x='82' y='188.5' fontSize='13' fill='#3A4A58' textAnchor='start' fontFamily='Microsoft YaHei'&gt;的：一串商品名、一堆分数、一串待办事项。&lt;/text&gt;&lt;rect x='468' y='96' width='368' height='330' rx='12' fill='#FFFFFF' stroke='#D8E3EE' /&gt;&lt;rect x='468' y='96' width='368' height='4' rx='2' fill='#1F5FA8' /&gt;&lt;text x='486' y='130' fontSize='15.5' fontWeight='bold' fill='#1F5FA8' textAnchor='start' fontFamily='Microsoft YaHei'&gt;2.2 索引从 0 开始：为什么不是从 1 开始&lt;/text&gt;&lt;text x='486' y='169.0' fontSize='13' fill='#3A4A58' textAnchor='start' fontFamily='Microsoft YaHei'&gt;· 越界会报 IndexError：cars[3] 或 cars[-4] 都会崩&lt;/text&gt;&lt;text x='486' y='188.5' fontSize='13' fill='#3A4A58' textAnchor='start' fontFamily='Microsoft YaHei'&gt;。&lt;/text&gt;&lt;rect x='872' y='96' width='368' height='330' rx='12' fill='#FFFFFF' stroke='#D8E3EE' /&gt;&lt;rect x='872' y='96' width='368' height='4' rx='2' fill='#1F5FA8' /&gt;&lt;text x='890' y='130' fontSize='15.5' fontWeight='bold' fill='#1F5FA8' textAnchor='start' fontFamily='Microsoft YaHei'&gt;2.3 列表是可变的：能直接改&lt;/text&gt;&lt;text x='890' y='169.0' fontSize='13' fill='#3A4A58' textAnchor='start' fontFamily='Microsoft YaHei'&gt;· 列表元素可以是任意类型，包括另一个列表（叫嵌套列表&lt;/text&gt;&lt;text x='890' y='188.5' fontSize='13' fill='#3A4A58' textAnchor='start' fontFamily='Microsoft YaHei'&gt;）：&lt;/text&gt;&lt;rect x='64' y='574' width='1152' height='66' rx='12' fill='#EEF5FB' /&gt;&lt;text x='84' y='616' fontSize='14' fill='#243444' textAnchor='start' fontFamily='Microsoft YaHei'&gt;看不懂的地方先回讲义对应小节读一遍，再回来对着这页复述一次——能讲出来才算真懂。&lt;/text&gt;&#13;&#10;            &lt;text x='64' y='684' fontSize='13' fill='#8A9AAA' fontFamily='Microsoft YaHei'&gt;Python 讲授课件 · 逐节版&lt;/text&gt;&#13;&#10;            &lt;text x='1216' y='684' fontSize='13' fill='#8A9AAA' textAnchor='end' fontFamily='Microsoft YaHei'&gt;单元 2 · 第 10 节&lt;/text&gt;&#13;&#10;        &lt;/svg&gt;&#13;&#10;    &lt;/Box&gt;&#13;&#10;&lt;/Slide&gt;&#13;&#10;"/>
+        <p:cNvPr id="29" name="" descr="&lt;Slide style={{ width: '1280px', height: '720px', backgroundColor: '#FAFCFE', padding: 0, position: 'relative', overflow: 'hidden' }}&gt;&#13;&#10;    &lt;Box style={{ position: 'absolute', left: 64, top: 36, width: '1152px', flexDirection: 'row', alignItems: 'center', gap: 12 }}&gt;&#13;&#10;        &lt;Box style={{ background: '#0E9B78', borderRadius: 5, padding: '3px 11px' }}&gt;&#13;&#10;            &lt;Text style={{ fontSize: 14, fontWeight: 'bold', color: '#FFFFFF' }}&gt;第 10 节&lt;/Text&gt;&#13;&#10;        &lt;/Box&gt;&#13;&#10;        &lt;Text style={{ fontSize: 30, fontWeight: 'bold', color: '#16232E' }}&gt;核心知识点&lt;/Text&gt;&#13;&#10;        &lt;Text style={{ fontSize: 15, color: '#5A6B7A', marginTop: 10 }}&gt;· 列表是什么、索引为什么从 0 开始&lt;/Text&gt;&#13;&#10;    &lt;/Box&gt;&#13;&#10;    &lt;Box style={{ position: 'absolute', left: 0, top: 0, width: '1280px', height: '720px' }}&gt;&#13;&#10;        &lt;svg width='1280' height='720' viewBox='0 0 1280 720'&gt;&#13;&#10;            &lt;rect x='64' y='96' width='368' height='330' rx='12' fill='#FFFFFF' stroke='#D8E3EE' /&gt;&lt;rect x='64' y='96' width='368' height='4' rx='2' fill='#1F5FA8' /&gt;&lt;text x='82' y='130' fontSize='15.5' fontWeight='bold' fill='#1F5FA8' textAnchor='start' fontFamily='Microsoft YaHei'&gt;2.1 列表：一个名字，一排抽屉&lt;/text&gt;&lt;text x='82' y='169.0' fontSize='13' fill='#3A4A58' textAnchor='start' fontFamily='Microsoft YaHei'&gt;· 到目前为止，变量只能装一个值。&lt;/text&gt;&lt;rect x='468' y='96' width='368' height='330' rx='12' fill='#FFFFFF' stroke='#D8E3EE' /&gt;&lt;rect x='468' y='96' width='368' height='4' rx='2' fill='#1F5FA8' /&gt;&lt;text x='486' y='130' fontSize='15.5' fontWeight='bold' fill='#1F5FA8' textAnchor='start' fontFamily='Microsoft YaHei'&gt;2.2 索引从 0 开始：为什么不是从 1 开始&lt;/text&gt;&lt;text x='486' y='169.0' fontSize='13' fill='#3A4A58' textAnchor='start' fontFamily='Microsoft YaHei'&gt;· 越界会报 IndexError&lt;/text&gt;&lt;rect x='872' y='96' width='368' height='330' rx='12' fill='#FFFFFF' stroke='#D8E3EE' /&gt;&lt;rect x='872' y='96' width='368' height='4' rx='2' fill='#1F5FA8' /&gt;&lt;text x='890' y='130' fontSize='15.5' fontWeight='bold' fill='#1F5FA8' textAnchor='start' fontFamily='Microsoft YaHei'&gt;2.3 列表是可变的：能直接改&lt;/text&gt;&lt;text x='890' y='169.0' fontSize='13' fill='#3A4A58' textAnchor='start' fontFamily='Microsoft YaHei'&gt;· 列表元素可以是任意类型&lt;/text&gt;&lt;rect x='64' y='574' width='1152' height='66' rx='12' fill='#EEF5FB' /&gt;&lt;text x='84' y='616' fontSize='14' fill='#243444' textAnchor='start' fontFamily='Microsoft YaHei'&gt;看不懂的地方先回讲义对应小节读一遍，再回来对着这页复述一次——能讲出来才算真懂。&lt;/text&gt;&#13;&#10;            &lt;text x='64' y='684' fontSize='13' fill='#8A9AAA' fontFamily='Microsoft YaHei'&gt;Python 讲授课件 · 逐节版&lt;/text&gt;&#13;&#10;            &lt;text x='1216' y='684' fontSize='13' fill='#8A9AAA' textAnchor='end' fontFamily='Microsoft YaHei'&gt;单元 2 · 第 10 节&lt;/text&gt;&#13;&#10;        &lt;/svg&gt;&#13;&#10;    &lt;/Box&gt;&#13;&#10;&lt;/Slide&gt;&#13;&#10;"/>
         <p:cNvGrpSpPr/>
         <p:nvPr/>
       </p:nvGrpSpPr>
@@ -2128,7 +2128,7 @@
   <p:cSld>
     <p:spTree>
       <p:nvGrpSpPr>
-        <p:cNvPr id="42" name="" descr="&lt;Slide style={{ width: '1280px', height: '720px', backgroundColor: '#FAFCFE', padding: 0, position: 'relative', overflow: 'hidden' }}&gt;&#13;&#10;    &lt;Box style={{ position: 'absolute', left: 64, top: 36, width: '1152px', flexDirection: 'row', alignItems: 'center', gap: 12 }}&gt;&#13;&#10;        &lt;Box style={{ background: '#0E9B78', borderRadius: 5, padding: '3px 11px' }}&gt;&#13;&#10;            &lt;Text style={{ fontSize: 14, fontWeight: 'bold', color: '#FFFFFF' }}&gt;第 11 节&lt;/Text&gt;&#13;&#10;        &lt;/Box&gt;&#13;&#10;        &lt;Text style={{ fontSize: 30, fontWeight: 'bold', color: '#16232E' }}&gt;核心知识点&lt;/Text&gt;&#13;&#10;        &lt;Text style={{ fontSize: 15, color: '#5A6B7A', marginTop: 10 }}&gt;· 增删改查、引用共享与排序&lt;/Text&gt;&#13;&#10;    &lt;/Box&gt;&#13;&#10;    &lt;Box style={{ position: 'absolute', left: 0, top: 0, width: '1280px', height: '720px' }}&gt;&#13;&#10;        &lt;svg width='1280' height='720' viewBox='0 0 1280 720'&gt;&#13;&#10;            &lt;rect x='64' y='96' width='368' height='330' rx='12' fill='#FFFFFF' stroke='#D8E3EE' /&gt;&lt;rect x='64' y='96' width='368' height='4' rx='2' fill='#1F5FA8' /&gt;&lt;text x='82' y='130' fontSize='15.5' fontWeight='bold' fill='#1F5FA8' textAnchor='start' fontFamily='Microsoft YaHei'&gt;2.4 增删改方法：五个主力&lt;/text&gt;&lt;text x='82' y='169.0' fontSize='13' fill='#3A4A58' textAnchor='start' fontFamily='Microsoft YaHei'&gt;· cars = [&quot;小红帽&quot;, &quot;凯迪拉克&quot;]&lt;/text&gt;&lt;rect x='468' y='96' width='368' height='330' rx='12' fill='#FFFFFF' stroke='#D8E3EE' /&gt;&lt;rect x='468' y='96' width='368' height='4' rx='2' fill='#1F5FA8' /&gt;&lt;text x='486' y='130' fontSize='15.5' fontWeight='bold' fill='#1F5FA8' textAnchor='start' fontFamily='Microsoft YaHei'&gt;2.5 .remove() 与 .pop()：一个删&quot;值&quot;…&lt;/text&gt;&lt;text x='486' y='169.0' fontSize='13' fill='#3A4A58' textAnchor='start' fontFamily='Microsoft YaHei'&gt;· 这是本单元最容易混淆的一对：&lt;/text&gt;&lt;rect x='872' y='96' width='368' height='330' rx='12' fill='#FFFFFF' stroke='#D8E3EE' /&gt;&lt;rect x='872' y='96' width='368' height='4' rx='2' fill='#1F5FA8' /&gt;&lt;text x='890' y='130' fontSize='15.5' fontWeight='bold' fill='#1F5FA8' textAnchor='start' fontFamily='Microsoft YaHei'&gt;2.6 引用共享：最反直觉的一课&lt;/text&gt;&lt;text x='890' y='169.0' fontSize='13' fill='#3A4A58' textAnchor='start' fontFamily='Microsoft YaHei'&gt;· 这是初学者最容易踩的坑，也是&quot;浅拷贝&quot;概念的入门。&lt;/text&gt;&lt;text x='64' y='470' fontSize='14.5' fontWeight='bold' fill='#0E9B78' textAnchor='start' fontFamily='Microsoft YaHei'&gt;本节的代码示例&lt;/text&gt;&lt;text x='64' y='500' fontSize='13' fill='#3A4A58' textAnchor='start' fontFamily='Microsoft YaHei'&gt;· 创建列表与基本访问&lt;/text&gt;&lt;text x='468' y='500' fontSize='13' fill='#3A4A58' textAnchor='start' fontFamily='Microsoft YaHei'&gt;· 修改元素（列表可变的体现）&lt;/text&gt;&lt;text x='872' y='500' fontSize='13' fill='#3A4A58' textAnchor='start' fontFamily='Microsoft YaHei'&gt;· 添加元素&lt;/text&gt;&lt;rect x='64' y='574' width='1152' height='66' rx='12' fill='#EEF5FB' /&gt;&lt;text x='84' y='616' fontSize='14' fill='#243444' textAnchor='start' fontFamily='Microsoft YaHei'&gt;看不懂的地方先回讲义对应小节读一遍，再回来对着这页复述一次——能讲出来才算真懂。&lt;/text&gt;&#13;&#10;            &lt;text x='64' y='684' fontSize='13' fill='#8A9AAA' fontFamily='Microsoft YaHei'&gt;Python 讲授课件 · 逐节版&lt;/text&gt;&#13;&#10;            &lt;text x='1216' y='684' fontSize='13' fill='#8A9AAA' textAnchor='end' fontFamily='Microsoft YaHei'&gt;单元 2 · 第 11 节&lt;/text&gt;&#13;&#10;        &lt;/svg&gt;&#13;&#10;    &lt;/Box&gt;&#13;&#10;&lt;/Slide&gt;&#13;&#10;"/>
+        <p:cNvPr id="42" name="" descr="&lt;Slide style={{ width: '1280px', height: '720px', backgroundColor: '#FAFCFE', padding: 0, position: 'relative', overflow: 'hidden' }}&gt;&#13;&#10;    &lt;Box style={{ position: 'absolute', left: 64, top: 36, width: '1152px', flexDirection: 'row', alignItems: 'center', gap: 12 }}&gt;&#13;&#10;        &lt;Box style={{ background: '#0E9B78', borderRadius: 5, padding: '3px 11px' }}&gt;&#13;&#10;            &lt;Text style={{ fontSize: 14, fontWeight: 'bold', color: '#FFFFFF' }}&gt;第 11 节&lt;/Text&gt;&#13;&#10;        &lt;/Box&gt;&#13;&#10;        &lt;Text style={{ fontSize: 30, fontWeight: 'bold', color: '#16232E' }}&gt;核心知识点&lt;/Text&gt;&#13;&#10;        &lt;Text style={{ fontSize: 15, color: '#5A6B7A', marginTop: 10 }}&gt;· 增删改查、引用共享与排序&lt;/Text&gt;&#13;&#10;    &lt;/Box&gt;&#13;&#10;    &lt;Box style={{ position: 'absolute', left: 0, top: 0, width: '1280px', height: '720px' }}&gt;&#13;&#10;        &lt;svg width='1280' height='720' viewBox='0 0 1280 720'&gt;&#13;&#10;            &lt;rect x='64' y='96' width='368' height='330' rx='12' fill='#FFFFFF' stroke='#D8E3EE' /&gt;&lt;rect x='64' y='96' width='368' height='4' rx='2' fill='#1F5FA8' /&gt;&lt;text x='82' y='130' fontSize='15.5' fontWeight='bold' fill='#1F5FA8' textAnchor='start' fontFamily='Microsoft YaHei'&gt;2.4 增删改方法：五个主力&lt;/text&gt;&lt;text x='82' y='169.0' fontSize='13' fill='#3A4A58' textAnchor='start' fontFamily='Microsoft YaHei'&gt;· cars = [&quot;小红帽&quot;, &quot;凯迪拉克&quot;]&lt;/text&gt;&lt;rect x='468' y='96' width='368' height='330' rx='12' fill='#FFFFFF' stroke='#D8E3EE' /&gt;&lt;rect x='468' y='96' width='368' height='4' rx='2' fill='#1F5FA8' /&gt;&lt;text x='486' y='130' fontSize='15.5' fontWeight='bold' fill='#1F5FA8' textAnchor='start' fontFamily='Microsoft YaHei'&gt;2.5 .remove() 与 .pop()…&lt;/text&gt;&lt;text x='486' y='169.0' fontSize='13' fill='#3A4A58' textAnchor='start' fontFamily='Microsoft YaHei'&gt;· 这是本单元最容易混淆的一对：&lt;/text&gt;&lt;rect x='872' y='96' width='368' height='330' rx='12' fill='#FFFFFF' stroke='#D8E3EE' /&gt;&lt;rect x='872' y='96' width='368' height='4' rx='2' fill='#1F5FA8' /&gt;&lt;text x='890' y='130' fontSize='15.5' fontWeight='bold' fill='#1F5FA8' textAnchor='start' fontFamily='Microsoft YaHei'&gt;2.6 引用共享：最反直觉的一课&lt;/text&gt;&lt;text x='890' y='169.0' fontSize='13' fill='#3A4A58' textAnchor='start' fontFamily='Microsoft YaHei'&gt;· 这是初学者最容易踩的坑，也是&quot;浅拷贝&quot;概念的入门。&lt;/text&gt;&lt;text x='64' y='470' fontSize='14.5' fontWeight='bold' fill='#0E9B78' textAnchor='start' fontFamily='Microsoft YaHei'&gt;本节的代码示例&lt;/text&gt;&lt;text x='64' y='500' fontSize='13' fill='#3A4A58' textAnchor='start' fontFamily='Microsoft YaHei'&gt;· 创建列表与基本访问&lt;/text&gt;&lt;text x='468' y='500' fontSize='13' fill='#3A4A58' textAnchor='start' fontFamily='Microsoft YaHei'&gt;· 修改元素（列表可变的体现）&lt;/text&gt;&lt;text x='872' y='500' fontSize='13' fill='#3A4A58' textAnchor='start' fontFamily='Microsoft YaHei'&gt;· 添加元素&lt;/text&gt;&lt;rect x='64' y='574' width='1152' height='66' rx='12' fill='#EEF5FB' /&gt;&lt;text x='84' y='616' fontSize='14' fill='#243444' textAnchor='start' fontFamily='Microsoft YaHei'&gt;看不懂的地方先回讲义对应小节读一遍，再回来对着这页复述一次——能讲出来才算真懂。&lt;/text&gt;&#13;&#10;            &lt;text x='64' y='684' fontSize='13' fill='#8A9AAA' fontFamily='Microsoft YaHei'&gt;Python 讲授课件 · 逐节版&lt;/text&gt;&#13;&#10;            &lt;text x='1216' y='684' fontSize='13' fill='#8A9AAA' textAnchor='end' fontFamily='Microsoft YaHei'&gt;单元 2 · 第 11 节&lt;/text&gt;&#13;&#10;        &lt;/svg&gt;&#13;&#10;    &lt;/Box&gt;&#13;&#10;&lt;/Slide&gt;&#13;&#10;"/>
         <p:cNvGrpSpPr/>
         <p:nvPr/>
       </p:nvGrpSpPr>
@@ -2559,7 +2559,7 @@
   <p:cSld>
     <p:spTree>
       <p:nvGrpSpPr>
-        <p:cNvPr id="55" name="" descr="&lt;Slide style={{ width: '1280px', height: '720px', backgroundColor: '#FAFCFE', padding: 0, position: 'relative', overflow: 'hidden' }}&gt;&#13;&#10;    &lt;Box style={{ position: 'absolute', left: 64, top: 36, width: '1152px', flexDirection: 'row', alignItems: 'center', gap: 12 }}&gt;&#13;&#10;        &lt;Box style={{ background: '#0E9B78', borderRadius: 5, padding: '3px 11px' }}&gt;&#13;&#10;            &lt;Text style={{ fontSize: 14, fontWeight: 'bold', color: '#FFFFFF' }}&gt;第 12 节&lt;/Text&gt;&#13;&#10;        &lt;/Box&gt;&#13;&#10;        &lt;Text style={{ fontSize: 30, fontWeight: 'bold', color: '#16232E' }}&gt;核心知识点&lt;/Text&gt;&#13;&#10;        &lt;Text style={{ fontSize: 15, color: '#5A6B7A', marginTop: 10 }}&gt;· 动手实战与答案讲评&lt;/Text&gt;&#13;&#10;    &lt;/Box&gt;&#13;&#10;    &lt;Box style={{ position: 'absolute', left: 0, top: 0, width: '1280px', height: '720px' }}&gt;&#13;&#10;        &lt;svg width='1280' height='720' viewBox='0 0 1280 720'&gt;&#13;&#10;            &lt;rect x='64' y='96' width='368' height='330' rx='12' fill='#FFFFFF' stroke='#D8E3EE' /&gt;&lt;rect x='64' y='96' width='368' height='4' rx='2' fill='#1F5FA8' /&gt;&lt;text x='82' y='130' fontSize='15.5' fontWeight='bold' fill='#1F5FA8' textAnchor='start' fontFamily='Microsoft YaHei'&gt;基础档&lt;/text&gt;&lt;text x='82' y='169.0' fontSize='13' fill='#3A4A58' textAnchor='start' fontFamily='Microsoft YaHei'&gt;· 练习 2-1【我的收藏清单】&lt;/text&gt;&lt;text x='82' y='197.5' fontSize='13' fill='#3A4A58' textAnchor='start' fontFamily='Microsoft YaHei'&gt;· 练习 2-2【购物车】&lt;/text&gt;&lt;text x='82' y='226.0' fontSize='13' fill='#3A4A58' textAnchor='start' fontFamily='Microsoft YaHei'&gt;· 练习 2-3【正负索引热身】&lt;/text&gt;&lt;rect x='468' y='96' width='368' height='330' rx='12' fill='#FFFFFF' stroke='#D8E3EE' /&gt;&lt;rect x='468' y='96' width='368' height='4' rx='2' fill='#1F5FA8' /&gt;&lt;text x='486' y='130' fontSize='15.5' fontWeight='bold' fill='#1F5FA8' textAnchor='start' fontFamily='Microsoft YaHei'&gt;进阶档&lt;/text&gt;&lt;text x='486' y='169.0' fontSize='13' fill='#3A4A58' textAnchor='start' fontFamily='Microsoft YaHei'&gt;· 练习 2-5【成绩分析（不用循环）】&lt;/text&gt;&lt;text x='486' y='197.5' fontSize='13' fill='#3A4A58' textAnchor='start' fontFamily='Microsoft YaHei'&gt;· 练习 2-6【实现自己的&quot;栈&quot;】&lt;/text&gt;&lt;text x='486' y='226.0' fontSize='13' fill='#3A4A58' textAnchor='start' fontFamily='Microsoft YaHei'&gt;· 练习 2-7【嵌套列表访问】&lt;/text&gt;&lt;rect x='872' y='96' width='368' height='330' rx='12' fill='#FFFFFF' stroke='#D8E3EE' /&gt;&lt;rect x='872' y='96' width='368' height='4' rx='2' fill='#1F5FA8' /&gt;&lt;text x='890' y='130' fontSize='15.5' fontWeight='bold' fill='#1F5FA8' textAnchor='start' fontFamily='Microsoft YaHei'&gt;参考答案 2-1&lt;/text&gt;&lt;text x='890' y='169.0' fontSize='13' fill='#3A4A58' textAnchor='start' fontFamily='Microsoft YaHei'&gt;· hobbies = [&quot;阅读&quot;, &quot;篮球&quot;, &quot;烹饪&quot;, &quot;摄影&quot;, &quot;吉&lt;/text&gt;&lt;text x='890' y='188.5' fontSize='13' fill='#3A4A58' textAnchor='start' fontFamily='Microsoft YaHei'&gt;他&quot;]&lt;/text&gt;&lt;rect x='64' y='574' width='1152' height='66' rx='12' fill='#EEF5FB' /&gt;&lt;text x='84' y='616' fontSize='14' fill='#243444' textAnchor='start' fontFamily='Microsoft YaHei'&gt;看不懂的地方先回讲义对应小节读一遍，再回来对着这页复述一次——能讲出来才算真懂。&lt;/text&gt;&#13;&#10;            &lt;text x='64' y='684' fontSize='13' fill='#8A9AAA' fontFamily='Microsoft YaHei'&gt;Python 讲授课件 · 逐节版&lt;/text&gt;&#13;&#10;            &lt;text x='1216' y='684' fontSize='13' fill='#8A9AAA' textAnchor='end' fontFamily='Microsoft YaHei'&gt;单元 2 · 第 12 节&lt;/text&gt;&#13;&#10;        &lt;/svg&gt;&#13;&#10;    &lt;/Box&gt;&#13;&#10;&lt;/Slide&gt;&#13;&#10;"/>
+        <p:cNvPr id="55" name="" descr="&lt;Slide style={{ width: '1280px', height: '720px', backgroundColor: '#FAFCFE', padding: 0, position: 'relative', overflow: 'hidden' }}&gt;&#13;&#10;    &lt;Box style={{ position: 'absolute', left: 64, top: 36, width: '1152px', flexDirection: 'row', alignItems: 'center', gap: 12 }}&gt;&#13;&#10;        &lt;Box style={{ background: '#0E9B78', borderRadius: 5, padding: '3px 11px' }}&gt;&#13;&#10;            &lt;Text style={{ fontSize: 14, fontWeight: 'bold', color: '#FFFFFF' }}&gt;第 12 节&lt;/Text&gt;&#13;&#10;        &lt;/Box&gt;&#13;&#10;        &lt;Text style={{ fontSize: 30, fontWeight: 'bold', color: '#16232E' }}&gt;核心知识点&lt;/Text&gt;&#13;&#10;        &lt;Text style={{ fontSize: 15, color: '#5A6B7A', marginTop: 10 }}&gt;· 动手实战与答案讲评&lt;/Text&gt;&#13;&#10;    &lt;/Box&gt;&#13;&#10;    &lt;Box style={{ position: 'absolute', left: 0, top: 0, width: '1280px', height: '720px' }}&gt;&#13;&#10;        &lt;svg width='1280' height='720' viewBox='0 0 1280 720'&gt;&#13;&#10;            &lt;rect x='64' y='96' width='368' height='330' rx='12' fill='#FFFFFF' stroke='#D8E3EE' /&gt;&lt;rect x='64' y='96' width='368' height='4' rx='2' fill='#1F5FA8' /&gt;&lt;text x='82' y='130' fontSize='15.5' fontWeight='bold' fill='#1F5FA8' textAnchor='start' fontFamily='Microsoft YaHei'&gt;基础档&lt;/text&gt;&lt;text x='82' y='169.0' fontSize='13' fill='#3A4A58' textAnchor='start' fontFamily='Microsoft YaHei'&gt;· 练习 2-1【我的收藏清单】&lt;/text&gt;&lt;text x='82' y='197.5' fontSize='13' fill='#3A4A58' textAnchor='start' fontFamily='Microsoft YaHei'&gt;· 练习 2-2【购物车】&lt;/text&gt;&lt;text x='82' y='226.0' fontSize='13' fill='#3A4A58' textAnchor='start' fontFamily='Microsoft YaHei'&gt;· 练习 2-3【正负索引热身】&lt;/text&gt;&lt;rect x='468' y='96' width='368' height='330' rx='12' fill='#FFFFFF' stroke='#D8E3EE' /&gt;&lt;rect x='468' y='96' width='368' height='4' rx='2' fill='#1F5FA8' /&gt;&lt;text x='486' y='130' fontSize='15.5' fontWeight='bold' fill='#1F5FA8' textAnchor='start' fontFamily='Microsoft YaHei'&gt;进阶档&lt;/text&gt;&lt;text x='486' y='169.0' fontSize='13' fill='#3A4A58' textAnchor='start' fontFamily='Microsoft YaHei'&gt;· 练习 2-5【成绩分析（不用循环）】&lt;/text&gt;&lt;text x='486' y='197.5' fontSize='13' fill='#3A4A58' textAnchor='start' fontFamily='Microsoft YaHei'&gt;· 练习 2-6【实现自己的&quot;栈&quot;】&lt;/text&gt;&lt;text x='486' y='226.0' fontSize='13' fill='#3A4A58' textAnchor='start' fontFamily='Microsoft YaHei'&gt;· 练习 2-7【嵌套列表访问】&lt;/text&gt;&lt;rect x='872' y='96' width='368' height='330' rx='12' fill='#FFFFFF' stroke='#D8E3EE' /&gt;&lt;rect x='872' y='96' width='368' height='4' rx='2' fill='#1F5FA8' /&gt;&lt;text x='890' y='130' fontSize='15.5' fontWeight='bold' fill='#1F5FA8' textAnchor='start' fontFamily='Microsoft YaHei'&gt;参考答案 2-1&lt;/text&gt;&lt;text x='890' y='169.0' fontSize='13' fill='#3A4A58' textAnchor='start' fontFamily='Microsoft YaHei'&gt;· hobbies = [&quot;阅读&quot;, &quot;篮球&quot;, &quot;烹饪&quot;, &quot;摄影&quot;,&lt;/text&gt;&lt;text x='890' y='188.5' fontSize='13' fill='#3A4A58' textAnchor='start' fontFamily='Microsoft YaHei'&gt;&quot;吉他&quot;]&lt;/text&gt;&lt;rect x='64' y='574' width='1152' height='66' rx='12' fill='#EEF5FB' /&gt;&lt;text x='84' y='616' fontSize='14' fill='#243444' textAnchor='start' fontFamily='Microsoft YaHei'&gt;看不懂的地方先回讲义对应小节读一遍，再回来对着这页复述一次——能讲出来才算真懂。&lt;/text&gt;&#13;&#10;            &lt;text x='64' y='684' fontSize='13' fill='#8A9AAA' fontFamily='Microsoft YaHei'&gt;Python 讲授课件 · 逐节版&lt;/text&gt;&#13;&#10;            &lt;text x='1216' y='684' fontSize='13' fill='#8A9AAA' textAnchor='end' fontFamily='Microsoft YaHei'&gt;单元 2 · 第 12 节&lt;/text&gt;&#13;&#10;        &lt;/svg&gt;&#13;&#10;    &lt;/Box&gt;&#13;&#10;&lt;/Slide&gt;&#13;&#10;"/>
         <p:cNvGrpSpPr/>
         <p:nvPr/>
       </p:nvGrpSpPr>

--- a/python-course-ppt/逐节课件/Python讲授课件-单元02.pptx
+++ b/python-course-ppt/逐节课件/Python讲授课件-单元02.pptx
@@ -553,7 +553,7 @@
   <p:cSld>
     <p:spTree>
       <p:nvGrpSpPr>
-        <p:cNvPr id="1" name="" descr="&lt;Slide style={{ width: '1280px', height: '720px', backgroundColor: '#FAFCFE', padding: 0, position: 'relative', overflow: 'hidden' }}&gt;&#13;&#10;    &lt;Box style={{ position: 'absolute', left: 0, top: 0, width: '1280px', height: '150px', background: '#1F5FA8' }} /&gt;&#13;&#10;    &lt;Box style={{ position: 'absolute', left: 64, top: 34, width: '1152px', flexDirection: 'column' }}&gt;&#13;&#10;        &lt;Text style={{ fontSize: 15, fontWeight: 'bold', color: '#BFD9F2', letterSpacing: 2 }}&gt;阶段 1 · 单元 2&lt;/Text&gt;&#13;&#10;        &lt;Text style={{ fontSize: 38, fontWeight: 'bold', color: '#FFFFFF', marginTop: 6 }}&gt;列表简介&lt;/Text&gt;&#13;&#10;    &lt;/Box&gt;&#13;&#10;    &lt;Box style={{ position: 'absolute', left: 64, top: 168, width: '1152px', height: 470 }}&gt;&#13;&#10;        &lt;svg width='1152' height='470' viewBox='0 0 1152 470'&gt;&#13;&#10;            &lt;text x='0' y='18' fontSize='15' fontWeight='bold' fill='#16232E' fontFamily='Microsoft YaHei'&gt;本单元共 4 节课&lt;/text&gt;&#13;&#10;            &lt;rect x='0' y='196' width='1152' height='38' rx='7' fill='#FFFFFF' /&gt;&lt;text x='16' y='221' fontSize='15' fontWeight='bold' fill='#1F5FA8' fontFamily='Microsoft YaHei'&gt;第 10 节&lt;/text&gt;&lt;text x='96' y='221' fontSize='15' fill='#16232E' fontFamily='Microsoft YaHei'&gt;列表是什么、索引为什么从 0 开始&lt;/text&gt;&lt;text x='1080' y='221' fontSize='13' fill='#5A6B7A' textAnchor='end' fontFamily='Microsoft YaHei'&gt;W2&lt;/text&gt;&lt;rect x='0' y='238' width='1152' height='38' rx='7' fill='#F2F7FD' /&gt;&lt;text x='16' y='263' fontSize='15' fontWeight='bold' fill='#1F5FA8' fontFamily='Microsoft YaHei'&gt;第 11 节&lt;/text&gt;&lt;text x='96' y='263' fontSize='15' fill='#16232E' fontFamily='Microsoft YaHei'&gt;增删改查、引用共享与排序&lt;/text&gt;&lt;text x='1080' y='263' fontSize='13' fill='#5A6B7A' textAnchor='end' fontFamily='Microsoft YaHei'&gt;W2&lt;/text&gt;&lt;rect x='0' y='280' width='1152' height='38' rx='7' fill='#FFFFFF' /&gt;&lt;text x='16' y='305' fontSize='15' fontWeight='bold' fill='#1F5FA8' fontFamily='Microsoft YaHei'&gt;第 12 节&lt;/text&gt;&lt;text x='96' y='305' fontSize='15' fill='#16232E' fontFamily='Microsoft YaHei'&gt;动手实战与答案讲评&lt;/text&gt;&lt;text x='1080' y='305' fontSize='13' fill='#5A6B7A' textAnchor='end' fontFamily='Microsoft YaHei'&gt;W2&lt;/text&gt;&lt;rect x='0' y='322' width='1152' height='38' rx='7' fill='#F2F7FD' /&gt;&lt;text x='16' y='347' fontSize='15' fontWeight='bold' fill='#1F5FA8' fontFamily='Microsoft YaHei'&gt;第 13 节&lt;/text&gt;&lt;text x='96' y='347' fontSize='15' fill='#16232E' fontFamily='Microsoft YaHei'&gt;单元 2 验收复盘&lt;/text&gt;&lt;text x='1080' y='347' fontSize='13' fill='#5A6B7A' textAnchor='end' fontFamily='Microsoft YaHei'&gt;W2&lt;/text&gt;&#13;&#10;        &lt;/svg&gt;&#13;&#10;    &lt;/Box&gt;&#13;&#10;    &lt;Box style={{ position: 'absolute', left: 64, bottom: 22, width: '1152px', flexDirection: 'row', justifyContent: 'space-between' }}&gt;&#13;&#10;        &lt;Text style={{ fontSize: 13, color: '#8A9AAA' }}&gt;Python 讲授课件 · 逐节版&lt;/Text&gt;&#13;&#10;        &lt;Text style={{ fontSize: 13, color: '#8A9AAA' }}&gt;单元 2 · 封面&lt;/Text&gt;&#13;&#10;    &lt;/Box&gt;&#13;&#10;&lt;/Slide&gt;&#13;&#10;"/>
+        <p:cNvPr id="1" name="" descr="&lt;Slide style={{ width: '1280px', height: '720px', backgroundColor: '#FAFCFE', padding: 0, position: 'relative', overflow: 'hidden' }}&gt;&#13;&#10;    &lt;Box style={{ position: 'absolute', left: 0, top: 0, width: '1280px', height: '150px', background: '#1F5FA8' }} /&gt;&#13;&#10;    &lt;Box style={{ position: 'absolute', left: 64, top: 34, width: '1152px', flexDirection: 'column' }}&gt;&#13;&#10;        &lt;Text style={{ fontSize: 15, fontWeight: 'bold', color: '#BFD9F2', letterSpacing: 2 }}&gt;阶段 1 · 单元 2&lt;/Text&gt;&#13;&#10;        &lt;Text style={{ fontSize: 38, fontWeight: 'bold', color: '#FFFFFF', marginTop: 6 }}&gt;列表简介&lt;/Text&gt;&#13;&#10;    &lt;/Box&gt;&#13;&#10;    &lt;Box style={{ position: 'absolute', left: 64, top: 168, width: '1152px', height: 470 }}&gt;&#13;&#10;        &lt;svg width='1152' height='470' viewBox='0 0 1152 470'&gt;&#13;&#10;            &lt;text x='0' y='18' fontSize='15' fontWeight='bold' fill='#16232E' fontFamily='Microsoft YaHei'&gt;本单元共 4 节课&lt;/text&gt;&#13;&#10;            &lt;rect x='0' y='56.0' width='1152' height='48.0' rx='7' fill='#FFFFFF' /&gt;&lt;text x='16' y='85.0' fontSize='15' fontWeight='bold' fill='#1F5FA8' fontFamily='Microsoft YaHei'&gt;第 10 节&lt;/text&gt;&lt;text x='96' y='85.0' fontSize='15' fill='#16232E' fontFamily='Microsoft YaHei'&gt;列表是什么、索引为什么从 0 开始&lt;/text&gt;&lt;text x='1080' y='85.0' fontSize='13' fill='#5A6B7A' textAnchor='end' fontFamily='Microsoft YaHei'&gt;W2&lt;/text&gt;&lt;rect x='0' y='155.0' width='1152' height='48.0' rx='7' fill='#F2F7FD' /&gt;&lt;text x='16' y='184.0' fontSize='15' fontWeight='bold' fill='#1F5FA8' fontFamily='Microsoft YaHei'&gt;第 11 节&lt;/text&gt;&lt;text x='96' y='184.0' fontSize='15' fill='#16232E' fontFamily='Microsoft YaHei'&gt;增删改查、引用共享与排序&lt;/text&gt;&lt;text x='1080' y='184.0' fontSize='13' fill='#5A6B7A' textAnchor='end' fontFamily='Microsoft YaHei'&gt;W2&lt;/text&gt;&lt;rect x='0' y='254.0' width='1152' height='48.0' rx='7' fill='#FFFFFF' /&gt;&lt;text x='16' y='283.0' fontSize='15' fontWeight='bold' fill='#1F5FA8' fontFamily='Microsoft YaHei'&gt;第 12 节&lt;/text&gt;&lt;text x='96' y='283.0' fontSize='15' fill='#16232E' fontFamily='Microsoft YaHei'&gt;动手实战与答案讲评&lt;/text&gt;&lt;text x='1080' y='283.0' fontSize='13' fill='#5A6B7A' textAnchor='end' fontFamily='Microsoft YaHei'&gt;W2&lt;/text&gt;&lt;rect x='0' y='353.0' width='1152' height='48.0' rx='7' fill='#F2F7FD' /&gt;&lt;text x='16' y='382.0' fontSize='15' fontWeight='bold' fill='#1F5FA8' fontFamily='Microsoft YaHei'&gt;第 13 节&lt;/text&gt;&lt;text x='96' y='382.0' fontSize='15' fill='#16232E' fontFamily='Microsoft YaHei'&gt;单元 2 验收复盘&lt;/text&gt;&lt;text x='1080' y='382.0' fontSize='13' fill='#5A6B7A' textAnchor='end' fontFamily='Microsoft YaHei'&gt;W2&lt;/text&gt;&#13;&#10;        &lt;/svg&gt;&#13;&#10;    &lt;/Box&gt;&#13;&#10;    &lt;Box style={{ position: 'absolute', left: 64, bottom: 22, width: '1152px', flexDirection: 'row', justifyContent: 'space-between' }}&gt;&#13;&#10;        &lt;Text style={{ fontSize: 13, color: '#8A9AAA' }}&gt;Python 讲授课件 · 逐节版&lt;/Text&gt;&#13;&#10;        &lt;Text style={{ fontSize: 13, color: '#8A9AAA' }}&gt;单元 2 · 封面&lt;/Text&gt;&#13;&#10;    &lt;/Box&gt;&#13;&#10;&lt;/Slide&gt;&#13;&#10;"/>
         <p:cNvGrpSpPr/>
         <p:nvPr/>
       </p:nvGrpSpPr>
@@ -1677,7 +1677,7 @@
   <p:cSld>
     <p:spTree>
       <p:nvGrpSpPr>
-        <p:cNvPr id="29" name="" descr="&lt;Slide style={{ width: '1280px', height: '720px', backgroundColor: '#FAFCFE', padding: 0, position: 'relative', overflow: 'hidden' }}&gt;&#13;&#10;    &lt;Box style={{ position: 'absolute', left: 64, top: 36, width: '1152px', flexDirection: 'row', alignItems: 'center', gap: 12 }}&gt;&#13;&#10;        &lt;Box style={{ background: '#0E9B78', borderRadius: 5, padding: '3px 11px' }}&gt;&#13;&#10;            &lt;Text style={{ fontSize: 14, fontWeight: 'bold', color: '#FFFFFF' }}&gt;第 10 节&lt;/Text&gt;&#13;&#10;        &lt;/Box&gt;&#13;&#10;        &lt;Text style={{ fontSize: 30, fontWeight: 'bold', color: '#16232E' }}&gt;核心知识点&lt;/Text&gt;&#13;&#10;        &lt;Text style={{ fontSize: 15, color: '#5A6B7A', marginTop: 10 }}&gt;· 列表是什么、索引为什么从 0 开始&lt;/Text&gt;&#13;&#10;    &lt;/Box&gt;&#13;&#10;    &lt;Box style={{ position: 'absolute', left: 0, top: 0, width: '1280px', height: '720px' }}&gt;&#13;&#10;        &lt;svg width='1280' height='720' viewBox='0 0 1280 720'&gt;&#13;&#10;            &lt;rect x='64' y='96' width='368' height='330' rx='12' fill='#FFFFFF' stroke='#D8E3EE' /&gt;&lt;rect x='64' y='96' width='368' height='4' rx='2' fill='#1F5FA8' /&gt;&lt;text x='82' y='130' fontSize='15.5' fontWeight='bold' fill='#1F5FA8' textAnchor='start' fontFamily='Microsoft YaHei'&gt;2.1 列表：一个名字，一排抽屉&lt;/text&gt;&lt;text x='82' y='169.0' fontSize='13' fill='#3A4A58' textAnchor='start' fontFamily='Microsoft YaHei'&gt;· 到目前为止，变量只能装一个值。&lt;/text&gt;&lt;rect x='468' y='96' width='368' height='330' rx='12' fill='#FFFFFF' stroke='#D8E3EE' /&gt;&lt;rect x='468' y='96' width='368' height='4' rx='2' fill='#1F5FA8' /&gt;&lt;text x='486' y='130' fontSize='15.5' fontWeight='bold' fill='#1F5FA8' textAnchor='start' fontFamily='Microsoft YaHei'&gt;2.2 索引从 0 开始：为什么不是从 1 开始&lt;/text&gt;&lt;text x='486' y='169.0' fontSize='13' fill='#3A4A58' textAnchor='start' fontFamily='Microsoft YaHei'&gt;· 越界会报 IndexError&lt;/text&gt;&lt;rect x='872' y='96' width='368' height='330' rx='12' fill='#FFFFFF' stroke='#D8E3EE' /&gt;&lt;rect x='872' y='96' width='368' height='4' rx='2' fill='#1F5FA8' /&gt;&lt;text x='890' y='130' fontSize='15.5' fontWeight='bold' fill='#1F5FA8' textAnchor='start' fontFamily='Microsoft YaHei'&gt;2.3 列表是可变的：能直接改&lt;/text&gt;&lt;text x='890' y='169.0' fontSize='13' fill='#3A4A58' textAnchor='start' fontFamily='Microsoft YaHei'&gt;· 列表元素可以是任意类型&lt;/text&gt;&lt;rect x='64' y='574' width='1152' height='66' rx='12' fill='#EEF5FB' /&gt;&lt;text x='84' y='616' fontSize='14' fill='#243444' textAnchor='start' fontFamily='Microsoft YaHei'&gt;看不懂的地方先回讲义对应小节读一遍，再回来对着这页复述一次——能讲出来才算真懂。&lt;/text&gt;&#13;&#10;            &lt;text x='64' y='684' fontSize='13' fill='#8A9AAA' fontFamily='Microsoft YaHei'&gt;Python 讲授课件 · 逐节版&lt;/text&gt;&#13;&#10;            &lt;text x='1216' y='684' fontSize='13' fill='#8A9AAA' textAnchor='end' fontFamily='Microsoft YaHei'&gt;单元 2 · 第 10 节&lt;/text&gt;&#13;&#10;        &lt;/svg&gt;&#13;&#10;    &lt;/Box&gt;&#13;&#10;&lt;/Slide&gt;&#13;&#10;"/>
+        <p:cNvPr id="29" name="" descr="&lt;Slide style={{ width: '1280px', height: '720px', backgroundColor: '#FAFCFE', padding: 0, position: 'relative', overflow: 'hidden' }}&gt;&#13;&#10;    &lt;Box style={{ position: 'absolute', left: 64, top: 36, width: '1152px', flexDirection: 'row', alignItems: 'center', gap: 12 }}&gt;&#13;&#10;        &lt;Box style={{ background: '#0E9B78', borderRadius: 5, padding: '3px 11px' }}&gt;&#13;&#10;            &lt;Text style={{ fontSize: 14, fontWeight: 'bold', color: '#FFFFFF' }}&gt;第 10 节&lt;/Text&gt;&#13;&#10;        &lt;/Box&gt;&#13;&#10;        &lt;Text style={{ fontSize: 30, fontWeight: 'bold', color: '#16232E' }}&gt;核心知识点&lt;/Text&gt;&#13;&#10;        &lt;Text style={{ fontSize: 15, color: '#5A6B7A', marginTop: 10 }}&gt;· 列表是什么、索引为什么从 0 开始&lt;/Text&gt;&#13;&#10;    &lt;/Box&gt;&#13;&#10;    &lt;Box style={{ position: 'absolute', left: 0, top: 0, width: '1280px', height: '720px' }}&gt;&#13;&#10;        &lt;svg width='1280' height='720' viewBox='0 0 1280 720'&gt;&#13;&#10;            &lt;rect x='64' y='96' width='368' height='330' rx='12' fill='#FFFFFF' stroke='#D8E3EE' /&gt;&lt;rect x='64' y='96' width='368' height='4' rx='2' fill='#1F5FA8' /&gt;&lt;text x='82' y='130' fontSize='15.5' fontWeight='bold' fill='#1F5FA8' textAnchor='start' fontFamily='Microsoft YaHei'&gt;2.1 列表：一个名字，一排抽屉&lt;/text&gt;&lt;text x='82' y='169.0' fontSize='13' fill='#3A4A58' textAnchor='start' fontFamily='Microsoft YaHei'&gt;· 到目前为止，变量只能装一个值。&lt;/text&gt;&lt;text x='82' y='197.5' fontSize='13' fill='#3A4A58' textAnchor='start' fontFamily='Microsoft YaHei'&gt;· 变量像单个盒子，列表像一整排带编号的抽屉柜。&lt;/text&gt;&lt;rect x='468' y='96' width='368' height='330' rx='12' fill='#FFFFFF' stroke='#D8E3EE' /&gt;&lt;rect x='468' y='96' width='368' height='4' rx='2' fill='#1F5FA8' /&gt;&lt;text x='486' y='130' fontSize='15.5' fontWeight='bold' fill='#1F5FA8' textAnchor='start' fontFamily='Microsoft YaHei'&gt;2.2 索引从 0 开始：为什么不是从 1 开始&lt;/text&gt;&lt;text x='486' y='169.0' fontSize='13' fill='#3A4A58' textAnchor='start' fontFamily='Microsoft YaHei'&gt;· 越界会报 IndexError&lt;/text&gt;&lt;rect x='872' y='96' width='368' height='330' rx='12' fill='#FFFFFF' stroke='#D8E3EE' /&gt;&lt;rect x='872' y='96' width='368' height='4' rx='2' fill='#1F5FA8' /&gt;&lt;text x='890' y='130' fontSize='15.5' fontWeight='bold' fill='#1F5FA8' textAnchor='start' fontFamily='Microsoft YaHei'&gt;2.3 列表是可变的：能直接改&lt;/text&gt;&lt;text x='890' y='169.0' fontSize='13' fill='#3A4A58' textAnchor='start' fontFamily='Microsoft YaHei'&gt;· 列表元素可以是任意类型&lt;/text&gt;&lt;rect x='64' y='574' width='1152' height='66' rx='12' fill='#EEF5FB' /&gt;&lt;text x='84' y='616' fontSize='14' fill='#243444' textAnchor='start' fontFamily='Microsoft YaHei'&gt;看不懂的地方先回讲义对应小节读一遍，再回来对着这页复述一次——能讲出来才算真懂。&lt;/text&gt;&#13;&#10;            &lt;text x='64' y='684' fontSize='13' fill='#8A9AAA' fontFamily='Microsoft YaHei'&gt;Python 讲授课件 · 逐节版&lt;/text&gt;&#13;&#10;            &lt;text x='1216' y='684' fontSize='13' fill='#8A9AAA' textAnchor='end' fontFamily='Microsoft YaHei'&gt;单元 2 · 第 10 节&lt;/text&gt;&#13;&#10;        &lt;/svg&gt;&#13;&#10;    &lt;/Box&gt;&#13;&#10;&lt;/Slide&gt;&#13;&#10;"/>
         <p:cNvGrpSpPr/>
         <p:nvPr/>
       </p:nvGrpSpPr>
@@ -2128,7 +2128,7 @@
   <p:cSld>
     <p:spTree>
       <p:nvGrpSpPr>
-        <p:cNvPr id="42" name="" descr="&lt;Slide style={{ width: '1280px', height: '720px', backgroundColor: '#FAFCFE', padding: 0, position: 'relative', overflow: 'hidden' }}&gt;&#13;&#10;    &lt;Box style={{ position: 'absolute', left: 64, top: 36, width: '1152px', flexDirection: 'row', alignItems: 'center', gap: 12 }}&gt;&#13;&#10;        &lt;Box style={{ background: '#0E9B78', borderRadius: 5, padding: '3px 11px' }}&gt;&#13;&#10;            &lt;Text style={{ fontSize: 14, fontWeight: 'bold', color: '#FFFFFF' }}&gt;第 11 节&lt;/Text&gt;&#13;&#10;        &lt;/Box&gt;&#13;&#10;        &lt;Text style={{ fontSize: 30, fontWeight: 'bold', color: '#16232E' }}&gt;核心知识点&lt;/Text&gt;&#13;&#10;        &lt;Text style={{ fontSize: 15, color: '#5A6B7A', marginTop: 10 }}&gt;· 增删改查、引用共享与排序&lt;/Text&gt;&#13;&#10;    &lt;/Box&gt;&#13;&#10;    &lt;Box style={{ position: 'absolute', left: 0, top: 0, width: '1280px', height: '720px' }}&gt;&#13;&#10;        &lt;svg width='1280' height='720' viewBox='0 0 1280 720'&gt;&#13;&#10;            &lt;rect x='64' y='96' width='368' height='330' rx='12' fill='#FFFFFF' stroke='#D8E3EE' /&gt;&lt;rect x='64' y='96' width='368' height='4' rx='2' fill='#1F5FA8' /&gt;&lt;text x='82' y='130' fontSize='15.5' fontWeight='bold' fill='#1F5FA8' textAnchor='start' fontFamily='Microsoft YaHei'&gt;2.4 增删改方法：五个主力&lt;/text&gt;&lt;text x='82' y='169.0' fontSize='13' fill='#3A4A58' textAnchor='start' fontFamily='Microsoft YaHei'&gt;· cars = [&quot;小红帽&quot;, &quot;凯迪拉克&quot;]&lt;/text&gt;&lt;rect x='468' y='96' width='368' height='330' rx='12' fill='#FFFFFF' stroke='#D8E3EE' /&gt;&lt;rect x='468' y='96' width='368' height='4' rx='2' fill='#1F5FA8' /&gt;&lt;text x='486' y='130' fontSize='15.5' fontWeight='bold' fill='#1F5FA8' textAnchor='start' fontFamily='Microsoft YaHei'&gt;2.5 .remove() 与 .pop()…&lt;/text&gt;&lt;text x='486' y='169.0' fontSize='13' fill='#3A4A58' textAnchor='start' fontFamily='Microsoft YaHei'&gt;· 这是本单元最容易混淆的一对：&lt;/text&gt;&lt;rect x='872' y='96' width='368' height='330' rx='12' fill='#FFFFFF' stroke='#D8E3EE' /&gt;&lt;rect x='872' y='96' width='368' height='4' rx='2' fill='#1F5FA8' /&gt;&lt;text x='890' y='130' fontSize='15.5' fontWeight='bold' fill='#1F5FA8' textAnchor='start' fontFamily='Microsoft YaHei'&gt;2.6 引用共享：最反直觉的一课&lt;/text&gt;&lt;text x='890' y='169.0' fontSize='13' fill='#3A4A58' textAnchor='start' fontFamily='Microsoft YaHei'&gt;· 这是初学者最容易踩的坑，也是&quot;浅拷贝&quot;概念的入门。&lt;/text&gt;&lt;text x='64' y='470' fontSize='14.5' fontWeight='bold' fill='#0E9B78' textAnchor='start' fontFamily='Microsoft YaHei'&gt;本节的代码示例&lt;/text&gt;&lt;text x='64' y='500' fontSize='13' fill='#3A4A58' textAnchor='start' fontFamily='Microsoft YaHei'&gt;· 创建列表与基本访问&lt;/text&gt;&lt;text x='468' y='500' fontSize='13' fill='#3A4A58' textAnchor='start' fontFamily='Microsoft YaHei'&gt;· 修改元素（列表可变的体现）&lt;/text&gt;&lt;text x='872' y='500' fontSize='13' fill='#3A4A58' textAnchor='start' fontFamily='Microsoft YaHei'&gt;· 添加元素&lt;/text&gt;&lt;rect x='64' y='574' width='1152' height='66' rx='12' fill='#EEF5FB' /&gt;&lt;text x='84' y='616' fontSize='14' fill='#243444' textAnchor='start' fontFamily='Microsoft YaHei'&gt;看不懂的地方先回讲义对应小节读一遍，再回来对着这页复述一次——能讲出来才算真懂。&lt;/text&gt;&#13;&#10;            &lt;text x='64' y='684' fontSize='13' fill='#8A9AAA' fontFamily='Microsoft YaHei'&gt;Python 讲授课件 · 逐节版&lt;/text&gt;&#13;&#10;            &lt;text x='1216' y='684' fontSize='13' fill='#8A9AAA' textAnchor='end' fontFamily='Microsoft YaHei'&gt;单元 2 · 第 11 节&lt;/text&gt;&#13;&#10;        &lt;/svg&gt;&#13;&#10;    &lt;/Box&gt;&#13;&#10;&lt;/Slide&gt;&#13;&#10;"/>
+        <p:cNvPr id="42" name="" descr="&lt;Slide style={{ width: '1280px', height: '720px', backgroundColor: '#FAFCFE', padding: 0, position: 'relative', overflow: 'hidden' }}&gt;&#13;&#10;    &lt;Box style={{ position: 'absolute', left: 64, top: 36, width: '1152px', flexDirection: 'row', alignItems: 'center', gap: 12 }}&gt;&#13;&#10;        &lt;Box style={{ background: '#0E9B78', borderRadius: 5, padding: '3px 11px' }}&gt;&#13;&#10;            &lt;Text style={{ fontSize: 14, fontWeight: 'bold', color: '#FFFFFF' }}&gt;第 11 节&lt;/Text&gt;&#13;&#10;        &lt;/Box&gt;&#13;&#10;        &lt;Text style={{ fontSize: 30, fontWeight: 'bold', color: '#16232E' }}&gt;核心知识点&lt;/Text&gt;&#13;&#10;        &lt;Text style={{ fontSize: 15, color: '#5A6B7A', marginTop: 10 }}&gt;· 增删改查、引用共享与排序&lt;/Text&gt;&#13;&#10;    &lt;/Box&gt;&#13;&#10;    &lt;Box style={{ position: 'absolute', left: 0, top: 0, width: '1280px', height: '720px' }}&gt;&#13;&#10;        &lt;svg width='1280' height='720' viewBox='0 0 1280 720'&gt;&#13;&#10;            &lt;rect x='64' y='96' width='548' height='330' rx='12' fill='#FFFFFF' stroke='#D8E3EE' /&gt;&lt;rect x='64' y='96' width='548' height='4' rx='2' fill='#1F5FA8' /&gt;&lt;text x='82' y='130' fontSize='15.5' fontWeight='bold' fill='#1F5FA8' textAnchor='start' fontFamily='Microsoft YaHei'&gt;2.5 .remove() 与 .pop()…&lt;/text&gt;&lt;text x='82' y='169.0' fontSize='13' fill='#3A4A58' textAnchor='start' fontFamily='Microsoft YaHei'&gt;· del 和 .pop() 效果类似，但 del 不返回被删的元素，所以要保留就得改用&lt;/text&gt;&lt;text x='82' y='188.5' fontSize='13' fill='#3A4A58' textAnchor='start' fontFamily='Microsoft YaHei'&gt;.pop()。&lt;/text&gt;&lt;rect x='668' y='96' width='548' height='330' rx='12' fill='#FFFFFF' stroke='#D8E3EE' /&gt;&lt;rect x='668' y='96' width='548' height='4' rx='2' fill='#1F5FA8' /&gt;&lt;text x='686' y='130' fontSize='15.5' fontWeight='bold' fill='#1F5FA8' textAnchor='start' fontFamily='Microsoft YaHei'&gt;2.6 引用共享：最反直觉的一课&lt;/text&gt;&lt;text x='686' y='169.0' fontSize='13' fill='#3A4A58' textAnchor='start' fontFamily='Microsoft YaHei'&gt;· 这是初学者最容易踩的坑，也是&quot;浅拷贝&quot;概念的入门。&lt;/text&gt;&lt;text x='686' y='197.5' fontSize='13' fill='#3A4A58' textAnchor='start' fontFamily='Microsoft YaHei'&gt;· 你把同一本笔记本的封面同时写上了&quot;cars&quot;和&quot;other&quot;两个名字。&lt;/text&gt;&lt;text x='64' y='470' fontSize='14.5' fontWeight='bold' fill='#0E9B78' textAnchor='start' fontFamily='Microsoft YaHei'&gt;本节的代码示例&lt;/text&gt;&lt;text x='64' y='500' fontSize='13' fill='#3A4A58' textAnchor='start' fontFamily='Microsoft YaHei'&gt;· 创建列表与基本访问&lt;/text&gt;&lt;text x='468' y='500' fontSize='13' fill='#3A4A58' textAnchor='start' fontFamily='Microsoft YaHei'&gt;· 修改元素（列表可变的体现）&lt;/text&gt;&lt;text x='872' y='500' fontSize='13' fill='#3A4A58' textAnchor='start' fontFamily='Microsoft YaHei'&gt;· 添加元素&lt;/text&gt;&lt;rect x='64' y='574' width='1152' height='66' rx='12' fill='#EEF5FB' /&gt;&lt;text x='84' y='616' fontSize='14' fill='#243444' textAnchor='start' fontFamily='Microsoft YaHei'&gt;看不懂的地方先回讲义对应小节读一遍，再回来对着这页复述一次——能讲出来才算真懂。&lt;/text&gt;&#13;&#10;            &lt;text x='64' y='684' fontSize='13' fill='#8A9AAA' fontFamily='Microsoft YaHei'&gt;Python 讲授课件 · 逐节版&lt;/text&gt;&#13;&#10;            &lt;text x='1216' y='684' fontSize='13' fill='#8A9AAA' textAnchor='end' fontFamily='Microsoft YaHei'&gt;单元 2 · 第 11 节&lt;/text&gt;&#13;&#10;        &lt;/svg&gt;&#13;&#10;    &lt;/Box&gt;&#13;&#10;&lt;/Slide&gt;&#13;&#10;"/>
         <p:cNvGrpSpPr/>
         <p:nvPr/>
       </p:nvGrpSpPr>
@@ -2559,7 +2559,7 @@
   <p:cSld>
     <p:spTree>
       <p:nvGrpSpPr>
-        <p:cNvPr id="55" name="" descr="&lt;Slide style={{ width: '1280px', height: '720px', backgroundColor: '#FAFCFE', padding: 0, position: 'relative', overflow: 'hidden' }}&gt;&#13;&#10;    &lt;Box style={{ position: 'absolute', left: 64, top: 36, width: '1152px', flexDirection: 'row', alignItems: 'center', gap: 12 }}&gt;&#13;&#10;        &lt;Box style={{ background: '#0E9B78', borderRadius: 5, padding: '3px 11px' }}&gt;&#13;&#10;            &lt;Text style={{ fontSize: 14, fontWeight: 'bold', color: '#FFFFFF' }}&gt;第 12 节&lt;/Text&gt;&#13;&#10;        &lt;/Box&gt;&#13;&#10;        &lt;Text style={{ fontSize: 30, fontWeight: 'bold', color: '#16232E' }}&gt;核心知识点&lt;/Text&gt;&#13;&#10;        &lt;Text style={{ fontSize: 15, color: '#5A6B7A', marginTop: 10 }}&gt;· 动手实战与答案讲评&lt;/Text&gt;&#13;&#10;    &lt;/Box&gt;&#13;&#10;    &lt;Box style={{ position: 'absolute', left: 0, top: 0, width: '1280px', height: '720px' }}&gt;&#13;&#10;        &lt;svg width='1280' height='720' viewBox='0 0 1280 720'&gt;&#13;&#10;            &lt;rect x='64' y='96' width='368' height='330' rx='12' fill='#FFFFFF' stroke='#D8E3EE' /&gt;&lt;rect x='64' y='96' width='368' height='4' rx='2' fill='#1F5FA8' /&gt;&lt;text x='82' y='130' fontSize='15.5' fontWeight='bold' fill='#1F5FA8' textAnchor='start' fontFamily='Microsoft YaHei'&gt;基础档&lt;/text&gt;&lt;text x='82' y='169.0' fontSize='13' fill='#3A4A58' textAnchor='start' fontFamily='Microsoft YaHei'&gt;· 练习 2-1【我的收藏清单】&lt;/text&gt;&lt;text x='82' y='197.5' fontSize='13' fill='#3A4A58' textAnchor='start' fontFamily='Microsoft YaHei'&gt;· 练习 2-2【购物车】&lt;/text&gt;&lt;text x='82' y='226.0' fontSize='13' fill='#3A4A58' textAnchor='start' fontFamily='Microsoft YaHei'&gt;· 练习 2-3【正负索引热身】&lt;/text&gt;&lt;rect x='468' y='96' width='368' height='330' rx='12' fill='#FFFFFF' stroke='#D8E3EE' /&gt;&lt;rect x='468' y='96' width='368' height='4' rx='2' fill='#1F5FA8' /&gt;&lt;text x='486' y='130' fontSize='15.5' fontWeight='bold' fill='#1F5FA8' textAnchor='start' fontFamily='Microsoft YaHei'&gt;进阶档&lt;/text&gt;&lt;text x='486' y='169.0' fontSize='13' fill='#3A4A58' textAnchor='start' fontFamily='Microsoft YaHei'&gt;· 练习 2-5【成绩分析（不用循环）】&lt;/text&gt;&lt;text x='486' y='197.5' fontSize='13' fill='#3A4A58' textAnchor='start' fontFamily='Microsoft YaHei'&gt;· 练习 2-6【实现自己的&quot;栈&quot;】&lt;/text&gt;&lt;text x='486' y='226.0' fontSize='13' fill='#3A4A58' textAnchor='start' fontFamily='Microsoft YaHei'&gt;· 练习 2-7【嵌套列表访问】&lt;/text&gt;&lt;rect x='872' y='96' width='368' height='330' rx='12' fill='#FFFFFF' stroke='#D8E3EE' /&gt;&lt;rect x='872' y='96' width='368' height='4' rx='2' fill='#1F5FA8' /&gt;&lt;text x='890' y='130' fontSize='15.5' fontWeight='bold' fill='#1F5FA8' textAnchor='start' fontFamily='Microsoft YaHei'&gt;参考答案 2-1&lt;/text&gt;&lt;text x='890' y='169.0' fontSize='13' fill='#3A4A58' textAnchor='start' fontFamily='Microsoft YaHei'&gt;· hobbies = [&quot;阅读&quot;, &quot;篮球&quot;, &quot;烹饪&quot;, &quot;摄影&quot;,&lt;/text&gt;&lt;text x='890' y='188.5' fontSize='13' fill='#3A4A58' textAnchor='start' fontFamily='Microsoft YaHei'&gt;&quot;吉他&quot;]&lt;/text&gt;&lt;rect x='64' y='574' width='1152' height='66' rx='12' fill='#EEF5FB' /&gt;&lt;text x='84' y='616' fontSize='14' fill='#243444' textAnchor='start' fontFamily='Microsoft YaHei'&gt;看不懂的地方先回讲义对应小节读一遍，再回来对着这页复述一次——能讲出来才算真懂。&lt;/text&gt;&#13;&#10;            &lt;text x='64' y='684' fontSize='13' fill='#8A9AAA' fontFamily='Microsoft YaHei'&gt;Python 讲授课件 · 逐节版&lt;/text&gt;&#13;&#10;            &lt;text x='1216' y='684' fontSize='13' fill='#8A9AAA' textAnchor='end' fontFamily='Microsoft YaHei'&gt;单元 2 · 第 12 节&lt;/text&gt;&#13;&#10;        &lt;/svg&gt;&#13;&#10;    &lt;/Box&gt;&#13;&#10;&lt;/Slide&gt;&#13;&#10;"/>
+        <p:cNvPr id="55" name="" descr="&lt;Slide style={{ width: '1280px', height: '720px', backgroundColor: '#FAFCFE', padding: 0, position: 'relative', overflow: 'hidden' }}&gt;&#13;&#10;    &lt;Box style={{ position: 'absolute', left: 64, top: 36, width: '1152px', flexDirection: 'row', alignItems: 'center', gap: 12 }}&gt;&#13;&#10;        &lt;Box style={{ background: '#0E9B78', borderRadius: 5, padding: '3px 11px' }}&gt;&#13;&#10;            &lt;Text style={{ fontSize: 14, fontWeight: 'bold', color: '#FFFFFF' }}&gt;第 12 节&lt;/Text&gt;&#13;&#10;        &lt;/Box&gt;&#13;&#10;        &lt;Text style={{ fontSize: 30, fontWeight: 'bold', color: '#16232E' }}&gt;核心知识点&lt;/Text&gt;&#13;&#10;        &lt;Text style={{ fontSize: 15, color: '#5A6B7A', marginTop: 10 }}&gt;· 动手实战与答案讲评&lt;/Text&gt;&#13;&#10;    &lt;/Box&gt;&#13;&#10;    &lt;Box style={{ position: 'absolute', left: 0, top: 0, width: '1280px', height: '720px' }}&gt;&#13;&#10;        &lt;svg width='1280' height='720' viewBox='0 0 1280 720'&gt;&#13;&#10;            &lt;rect x='64' y='96' width='368' height='330' rx='12' fill='#FFFFFF' stroke='#D8E3EE' /&gt;&lt;rect x='64' y='96' width='368' height='4' rx='2' fill='#1F5FA8' /&gt;&lt;text x='82' y='130' fontSize='15.5' fontWeight='bold' fill='#1F5FA8' textAnchor='start' fontFamily='Microsoft YaHei'&gt;基础档&lt;/text&gt;&lt;text x='82' y='169.0' fontSize='13' fill='#3A4A58' textAnchor='start' fontFamily='Microsoft YaHei'&gt;· 练习 2-1【我的收藏清单】&lt;/text&gt;&lt;text x='82' y='197.5' fontSize='13' fill='#3A4A58' textAnchor='start' fontFamily='Microsoft YaHei'&gt;· 练习 2-2【购物车】&lt;/text&gt;&lt;text x='82' y='226.0' fontSize='13' fill='#3A4A58' textAnchor='start' fontFamily='Microsoft YaHei'&gt;· 练习 2-3【正负索引热身】&lt;/text&gt;&lt;rect x='468' y='96' width='368' height='330' rx='12' fill='#FFFFFF' stroke='#D8E3EE' /&gt;&lt;rect x='468' y='96' width='368' height='4' rx='2' fill='#1F5FA8' /&gt;&lt;text x='486' y='130' fontSize='15.5' fontWeight='bold' fill='#1F5FA8' textAnchor='start' fontFamily='Microsoft YaHei'&gt;进阶档&lt;/text&gt;&lt;text x='486' y='169.0' fontSize='13' fill='#3A4A58' textAnchor='start' fontFamily='Microsoft YaHei'&gt;· 练习 2-5【成绩分析（不用循环）】&lt;/text&gt;&lt;text x='486' y='197.5' fontSize='13' fill='#3A4A58' textAnchor='start' fontFamily='Microsoft YaHei'&gt;· 练习 2-6【实现自己的&quot;栈&quot;】&lt;/text&gt;&lt;text x='486' y='226.0' fontSize='13' fill='#3A4A58' textAnchor='start' fontFamily='Microsoft YaHei'&gt;· 练习 2-7【嵌套列表访问】&lt;/text&gt;&lt;rect x='872' y='96' width='368' height='330' rx='12' fill='#FFFFFF' stroke='#D8E3EE' /&gt;&lt;rect x='872' y='96' width='368' height='4' rx='2' fill='#1F5FA8' /&gt;&lt;text x='890' y='130' fontSize='15.5' fontWeight='bold' fill='#1F5FA8' textAnchor='start' fontFamily='Microsoft YaHei'&gt;参考答案 2-9&lt;/text&gt;&lt;text x='890' y='169.0' fontSize='13' fill='#3A4A58' textAnchor='start' fontFamily='Microsoft YaHei'&gt;· print(&quot;升序 &quot;, sorted(scores)) 里有两个空格…&lt;/text&gt;&lt;rect x='64' y='574' width='1152' height='66' rx='12' fill='#EEF5FB' /&gt;&lt;text x='84' y='616' fontSize='14' fill='#243444' textAnchor='start' fontFamily='Microsoft YaHei'&gt;看不懂的地方先回讲义对应小节读一遍，再回来对着这页复述一次——能讲出来才算真懂。&lt;/text&gt;&#13;&#10;            &lt;text x='64' y='684' fontSize='13' fill='#8A9AAA' fontFamily='Microsoft YaHei'&gt;Python 讲授课件 · 逐节版&lt;/text&gt;&#13;&#10;            &lt;text x='1216' y='684' fontSize='13' fill='#8A9AAA' textAnchor='end' fontFamily='Microsoft YaHei'&gt;单元 2 · 第 12 节&lt;/text&gt;&#13;&#10;        &lt;/svg&gt;&#13;&#10;    &lt;/Box&gt;&#13;&#10;&lt;/Slide&gt;&#13;&#10;"/>
         <p:cNvGrpSpPr/>
         <p:nvPr/>
       </p:nvGrpSpPr>

--- a/python-course-ppt/逐节课件/Python讲授课件-单元02.pptx
+++ b/python-course-ppt/逐节课件/Python讲授课件-单元02.pptx
@@ -234,6 +234,1038 @@
     </a:lvl9pPr>
   </p:notesStyle>
 </p:notesMaster>
+</file>
+
+<file path=ppt/notesSlides/notesSlide1.xml><?xml version="1.0" encoding="utf-8"?>
+<p:notes xmlns:a="http://schemas.openxmlformats.org/drawingml/2006/main" xmlns:p="http://schemas.openxmlformats.org/presentationml/2006/main" xmlns:r="http://schemas.openxmlformats.org/officeDocument/2006/relationships">
+  <p:cSld>
+    <p:spTree>
+      <p:nvGrpSpPr>
+        <p:cNvPr id="1" name=""/>
+        <p:cNvGrpSpPr/>
+        <p:nvPr/>
+      </p:nvGrpSpPr>
+      <p:grpSpPr>
+        <a:xfrm>
+          <a:off x="0" y="0"/>
+          <a:ext cx="0" cy="0"/>
+          <a:chOff x="0" y="0"/>
+          <a:chExt cx="0" cy="0"/>
+        </a:xfrm>
+      </p:grpSpPr>
+      <p:sp>
+        <p:nvSpPr>
+          <p:cNvPr id="2" name="讲课提示"/>
+          <p:cNvSpPr txBox="1"/>
+          <p:nvPr/>
+        </p:nvSpPr>
+        <p:spPr>
+          <a:xfrm>
+            <a:off x="457200" y="457200"/>
+            <a:ext cx="6858000" cy="4800600"/>
+          </a:xfrm>
+          <a:prstGeom prst="rect">
+            <a:avLst/>
+          </a:prstGeom>
+        </p:spPr>
+        <p:txBody>
+          <a:bodyPr wrap="square"/>
+          <a:lstStyle/>
+          <a:p>
+            <a:r>
+              <a:rPr lang="zh-CN" dirty="0"/>
+              <a:t>单元 2 · 单元 2 · 列表简介</a:t>
+            </a:r>
+          </a:p>
+          <a:p>
+            <a:r>
+              <a:rPr lang="zh-CN" dirty="0"/>
+              <a:t/>
+            </a:r>
+          </a:p>
+          <a:p>
+            <a:r>
+              <a:rPr lang="zh-CN" dirty="0"/>
+              <a:t>本单元包含以下课节：</a:t>
+            </a:r>
+          </a:p>
+          <a:p>
+            <a:r>
+              <a:rPr lang="zh-CN" dirty="0"/>
+              <a:t>· 第 10 节 列表是什么、索引为什么从 0 开始</a:t>
+            </a:r>
+          </a:p>
+          <a:p>
+            <a:r>
+              <a:rPr lang="zh-CN" dirty="0"/>
+              <a:t>· 第 11 节 增删改查、引用共享与排序</a:t>
+            </a:r>
+          </a:p>
+          <a:p>
+            <a:r>
+              <a:rPr lang="zh-CN" dirty="0"/>
+              <a:t>· 第 12 节 动手实战与答案讲评</a:t>
+            </a:r>
+          </a:p>
+          <a:p>
+            <a:r>
+              <a:rPr lang="zh-CN" dirty="0"/>
+              <a:t>· 第 13 节 单元 2 验收复盘</a:t>
+            </a:r>
+          </a:p>
+          <a:p>
+            <a:r>
+              <a:rPr lang="zh-CN" dirty="0"/>
+              <a:t/>
+            </a:r>
+          </a:p>
+          <a:p>
+            <a:r>
+              <a:rPr lang="zh-CN" dirty="0"/>
+              <a:t>开场用 3 分钟讲清：这个单元学完能做出什么，最后会被关卡怎么验。</a:t>
+            </a:r>
+          </a:p>
+        </p:txBody>
+      </p:sp>
+    </p:spTree>
+  </p:cSld>
+  <p:clrMapOvr>
+    <a:masterClrMapping/>
+  </p:clrMapOvr>
+</p:notes>
+</file>
+
+<file path=ppt/notesSlides/notesSlide10.xml><?xml version="1.0" encoding="utf-8"?>
+<p:notes xmlns:a="http://schemas.openxmlformats.org/drawingml/2006/main" xmlns:p="http://schemas.openxmlformats.org/presentationml/2006/main" xmlns:r="http://schemas.openxmlformats.org/officeDocument/2006/relationships">
+  <p:cSld>
+    <p:spTree>
+      <p:nvGrpSpPr>
+        <p:cNvPr id="1" name=""/>
+        <p:cNvGrpSpPr/>
+        <p:nvPr/>
+      </p:nvGrpSpPr>
+      <p:grpSpPr>
+        <a:xfrm>
+          <a:off x="0" y="0"/>
+          <a:ext cx="0" cy="0"/>
+          <a:chOff x="0" y="0"/>
+          <a:chExt cx="0" cy="0"/>
+        </a:xfrm>
+      </p:grpSpPr>
+      <p:sp>
+        <p:nvSpPr>
+          <p:cNvPr id="2" name="讲课提示"/>
+          <p:cNvSpPr txBox="1"/>
+          <p:nvPr/>
+        </p:nvSpPr>
+        <p:spPr>
+          <a:xfrm>
+            <a:off x="457200" y="457200"/>
+            <a:ext cx="6858000" cy="4800600"/>
+          </a:xfrm>
+          <a:prstGeom prst="rect">
+            <a:avLst/>
+          </a:prstGeom>
+        </p:spPr>
+        <p:txBody>
+          <a:bodyPr wrap="square"/>
+          <a:lstStyle/>
+          <a:p>
+            <a:r>
+              <a:rPr lang="zh-CN" dirty="0"/>
+              <a:t>单元 2 小结 · 单元 2 · 小结</a:t>
+            </a:r>
+          </a:p>
+          <a:p>
+            <a:r>
+              <a:rPr lang="zh-CN" dirty="0"/>
+              <a:t/>
+            </a:r>
+          </a:p>
+          <a:p>
+            <a:r>
+              <a:rPr lang="zh-CN" dirty="0"/>
+              <a:t>收尾动作：让学生合上讲义，口述本单元三个最重要的结论；说不出来的，回对应课节。</a:t>
+            </a:r>
+          </a:p>
+          <a:p>
+            <a:r>
+              <a:rPr lang="zh-CN" dirty="0"/>
+              <a:t>然后当场勾一遍本单元课节的「已完成」，没打勾的进下一单元前补掉。</a:t>
+            </a:r>
+          </a:p>
+        </p:txBody>
+      </p:sp>
+    </p:spTree>
+  </p:cSld>
+  <p:clrMapOvr>
+    <a:masterClrMapping/>
+  </p:clrMapOvr>
+</p:notes>
+</file>
+
+<file path=ppt/notesSlides/notesSlide2.xml><?xml version="1.0" encoding="utf-8"?>
+<p:notes xmlns:a="http://schemas.openxmlformats.org/drawingml/2006/main" xmlns:p="http://schemas.openxmlformats.org/presentationml/2006/main" xmlns:r="http://schemas.openxmlformats.org/officeDocument/2006/relationships">
+  <p:cSld>
+    <p:spTree>
+      <p:nvGrpSpPr>
+        <p:cNvPr id="1" name=""/>
+        <p:cNvGrpSpPr/>
+        <p:nvPr/>
+      </p:nvGrpSpPr>
+      <p:grpSpPr>
+        <a:xfrm>
+          <a:off x="0" y="0"/>
+          <a:ext cx="0" cy="0"/>
+          <a:chOff x="0" y="0"/>
+          <a:chExt cx="0" cy="0"/>
+        </a:xfrm>
+      </p:grpSpPr>
+      <p:sp>
+        <p:nvSpPr>
+          <p:cNvPr id="2" name="讲课提示"/>
+          <p:cNvSpPr txBox="1"/>
+          <p:nvPr/>
+        </p:nvSpPr>
+        <p:spPr>
+          <a:xfrm>
+            <a:off x="457200" y="457200"/>
+            <a:ext cx="6858000" cy="4800600"/>
+          </a:xfrm>
+          <a:prstGeom prst="rect">
+            <a:avLst/>
+          </a:prstGeom>
+        </p:spPr>
+        <p:txBody>
+          <a:bodyPr wrap="square"/>
+          <a:lstStyle/>
+          <a:p>
+            <a:r>
+              <a:rPr lang="zh-CN" dirty="0"/>
+              <a:t>第 10 节 · 列表是什么、索引为什么从 0 开始</a:t>
+            </a:r>
+          </a:p>
+          <a:p>
+            <a:r>
+              <a:rPr lang="zh-CN" dirty="0"/>
+              <a:t>单元 2 · 列表简介 · W2</a:t>
+            </a:r>
+          </a:p>
+          <a:p>
+            <a:r>
+              <a:rPr lang="zh-CN" dirty="0"/>
+              <a:t/>
+            </a:r>
+          </a:p>
+          <a:p>
+            <a:r>
+              <a:rPr lang="zh-CN" dirty="0"/>
+              <a:t>学习目标：理解「一排抽屉」模型，牢记索引从 0 开始与负索引</a:t>
+            </a:r>
+          </a:p>
+          <a:p>
+            <a:r>
+              <a:rPr lang="zh-CN" dirty="0"/>
+              <a:t/>
+            </a:r>
+          </a:p>
+          <a:p>
+            <a:r>
+              <a:rPr lang="zh-CN" dirty="0"/>
+              <a:t>课堂实操（40 分钟，不看答案）：</a:t>
+            </a:r>
+          </a:p>
+          <a:p>
+            <a:r>
+              <a:rPr lang="zh-CN" dirty="0"/>
+              <a:t>· 画一个列表并标出每个元素的下标</a:t>
+            </a:r>
+          </a:p>
+          <a:p>
+            <a:r>
+              <a:rPr lang="zh-CN" dirty="0"/>
+              <a:t>· 用负索引取最后三个元素</a:t>
+            </a:r>
+          </a:p>
+          <a:p>
+            <a:r>
+              <a:rPr lang="zh-CN" dirty="0"/>
+              <a:t/>
+            </a:r>
+          </a:p>
+          <a:p>
+            <a:r>
+              <a:rPr lang="zh-CN" dirty="0"/>
+              <a:t>课后作业：</a:t>
+            </a:r>
+          </a:p>
+          <a:p>
+            <a:r>
+              <a:rPr lang="zh-CN" dirty="0"/>
+              <a:t>· 完成动手练习 2-1 ~ 2-2</a:t>
+            </a:r>
+          </a:p>
+          <a:p>
+            <a:r>
+              <a:rPr lang="zh-CN" dirty="0"/>
+              <a:t/>
+            </a:r>
+          </a:p>
+          <a:p>
+            <a:r>
+              <a:rPr lang="zh-CN" dirty="0"/>
+              <a:t>节奏：讲 20 分钟 → 学员自己敲 40 分钟（不看答案）→ 对讲评自查 20 分钟 → 写作业 10 分钟。</a:t>
+            </a:r>
+          </a:p>
+        </p:txBody>
+      </p:sp>
+    </p:spTree>
+  </p:cSld>
+  <p:clrMapOvr>
+    <a:masterClrMapping/>
+  </p:clrMapOvr>
+</p:notes>
+</file>
+
+<file path=ppt/notesSlides/notesSlide3.xml><?xml version="1.0" encoding="utf-8"?>
+<p:notes xmlns:a="http://schemas.openxmlformats.org/drawingml/2006/main" xmlns:p="http://schemas.openxmlformats.org/presentationml/2006/main" xmlns:r="http://schemas.openxmlformats.org/officeDocument/2006/relationships">
+  <p:cSld>
+    <p:spTree>
+      <p:nvGrpSpPr>
+        <p:cNvPr id="1" name=""/>
+        <p:cNvGrpSpPr/>
+        <p:nvPr/>
+      </p:nvGrpSpPr>
+      <p:grpSpPr>
+        <a:xfrm>
+          <a:off x="0" y="0"/>
+          <a:ext cx="0" cy="0"/>
+          <a:chOff x="0" y="0"/>
+          <a:chExt cx="0" cy="0"/>
+        </a:xfrm>
+      </p:grpSpPr>
+      <p:sp>
+        <p:nvSpPr>
+          <p:cNvPr id="2" name="讲课提示"/>
+          <p:cNvSpPr txBox="1"/>
+          <p:nvPr/>
+        </p:nvSpPr>
+        <p:spPr>
+          <a:xfrm>
+            <a:off x="457200" y="457200"/>
+            <a:ext cx="6858000" cy="4800600"/>
+          </a:xfrm>
+          <a:prstGeom prst="rect">
+            <a:avLst/>
+          </a:prstGeom>
+        </p:spPr>
+        <p:txBody>
+          <a:bodyPr wrap="square"/>
+          <a:lstStyle/>
+          <a:p>
+            <a:r>
+              <a:rPr lang="zh-CN" dirty="0"/>
+              <a:t>第 10 节 · 核心知识点：列表是什么、索引为什么从 0 开始</a:t>
+            </a:r>
+          </a:p>
+          <a:p>
+            <a:r>
+              <a:rPr lang="zh-CN" dirty="0"/>
+              <a:t/>
+            </a:r>
+          </a:p>
+          <a:p>
+            <a:r>
+              <a:rPr lang="zh-CN" dirty="0"/>
+              <a:t>讲这一页时：先让学生说出上节课的结论，再逐块讲要点。</a:t>
+            </a:r>
+          </a:p>
+          <a:p>
+            <a:r>
+              <a:rPr lang="zh-CN" dirty="0"/>
+              <a:t>每讲完一块，问一句「这一步如果写错了，报错会长什么样？」——把错误提前讲。</a:t>
+            </a:r>
+          </a:p>
+          <a:p>
+            <a:r>
+              <a:rPr lang="zh-CN" dirty="0"/>
+              <a:t/>
+            </a:r>
+          </a:p>
+          <a:p>
+            <a:r>
+              <a:rPr lang="zh-CN" dirty="0"/>
+              <a:t>本节目标：理解「一排抽屉」模型，牢记索引从 0 开始与负索引</a:t>
+            </a:r>
+          </a:p>
+          <a:p>
+            <a:r>
+              <a:rPr lang="zh-CN" dirty="0"/>
+              <a:t/>
+            </a:r>
+          </a:p>
+          <a:p>
+            <a:r>
+              <a:rPr lang="zh-CN" dirty="0"/>
+              <a:t>看不到懂的地方，回讲义对应小节读一遍，再回来对着这页复述一次——能讲出来才算真懂。</a:t>
+            </a:r>
+          </a:p>
+        </p:txBody>
+      </p:sp>
+    </p:spTree>
+  </p:cSld>
+  <p:clrMapOvr>
+    <a:masterClrMapping/>
+  </p:clrMapOvr>
+</p:notes>
+</file>
+
+<file path=ppt/notesSlides/notesSlide4.xml><?xml version="1.0" encoding="utf-8"?>
+<p:notes xmlns:a="http://schemas.openxmlformats.org/drawingml/2006/main" xmlns:p="http://schemas.openxmlformats.org/presentationml/2006/main" xmlns:r="http://schemas.openxmlformats.org/officeDocument/2006/relationships">
+  <p:cSld>
+    <p:spTree>
+      <p:nvGrpSpPr>
+        <p:cNvPr id="1" name=""/>
+        <p:cNvGrpSpPr/>
+        <p:nvPr/>
+      </p:nvGrpSpPr>
+      <p:grpSpPr>
+        <a:xfrm>
+          <a:off x="0" y="0"/>
+          <a:ext cx="0" cy="0"/>
+          <a:chOff x="0" y="0"/>
+          <a:chExt cx="0" cy="0"/>
+        </a:xfrm>
+      </p:grpSpPr>
+      <p:sp>
+        <p:nvSpPr>
+          <p:cNvPr id="2" name="讲课提示"/>
+          <p:cNvSpPr txBox="1"/>
+          <p:nvPr/>
+        </p:nvSpPr>
+        <p:spPr>
+          <a:xfrm>
+            <a:off x="457200" y="457200"/>
+            <a:ext cx="6858000" cy="4800600"/>
+          </a:xfrm>
+          <a:prstGeom prst="rect">
+            <a:avLst/>
+          </a:prstGeom>
+        </p:spPr>
+        <p:txBody>
+          <a:bodyPr wrap="square"/>
+          <a:lstStyle/>
+          <a:p>
+            <a:r>
+              <a:rPr lang="zh-CN" dirty="0"/>
+              <a:t>第 11 节 · 增删改查、引用共享与排序</a:t>
+            </a:r>
+          </a:p>
+          <a:p>
+            <a:r>
+              <a:rPr lang="zh-CN" dirty="0"/>
+              <a:t>单元 2 · 列表简介 · W2</a:t>
+            </a:r>
+          </a:p>
+          <a:p>
+            <a:r>
+              <a:rPr lang="zh-CN" dirty="0"/>
+              <a:t/>
+            </a:r>
+          </a:p>
+          <a:p>
+            <a:r>
+              <a:rPr lang="zh-CN" dirty="0"/>
+              <a:t>学习目标：掌握五个增删改方法；理解引用共享——本单元最反直觉的一课</a:t>
+            </a:r>
+          </a:p>
+          <a:p>
+            <a:r>
+              <a:rPr lang="zh-CN" dirty="0"/>
+              <a:t/>
+            </a:r>
+          </a:p>
+          <a:p>
+            <a:r>
+              <a:rPr lang="zh-CN" dirty="0"/>
+              <a:t>课堂实操（40 分钟，不看答案）：</a:t>
+            </a:r>
+          </a:p>
+          <a:p>
+            <a:r>
+              <a:rPr lang="zh-CN" dirty="0"/>
+              <a:t>· ★ 现场演示 a = b[:] 与 a = b 的区别</a:t>
+            </a:r>
+          </a:p>
+          <a:p>
+            <a:r>
+              <a:rPr lang="zh-CN" dirty="0"/>
+              <a:t>· 对同一列表做 20 次增删改排序操作</a:t>
+            </a:r>
+          </a:p>
+          <a:p>
+            <a:r>
+              <a:rPr lang="zh-CN" dirty="0"/>
+              <a:t/>
+            </a:r>
+          </a:p>
+          <a:p>
+            <a:r>
+              <a:rPr lang="zh-CN" dirty="0"/>
+              <a:t>课后作业：</a:t>
+            </a:r>
+          </a:p>
+          <a:p>
+            <a:r>
+              <a:rPr lang="zh-CN" dirty="0"/>
+              <a:t>· 完成动手练习进阶档 2-3 ~ 2-8</a:t>
+            </a:r>
+          </a:p>
+          <a:p>
+            <a:r>
+              <a:rPr lang="zh-CN" dirty="0"/>
+              <a:t/>
+            </a:r>
+          </a:p>
+          <a:p>
+            <a:r>
+              <a:rPr lang="zh-CN" dirty="0"/>
+              <a:t>节奏：讲 20 分钟 → 学员自己敲 40 分钟（不看答案）→ 对讲评自查 20 分钟 → 写作业 10 分钟。</a:t>
+            </a:r>
+          </a:p>
+        </p:txBody>
+      </p:sp>
+    </p:spTree>
+  </p:cSld>
+  <p:clrMapOvr>
+    <a:masterClrMapping/>
+  </p:clrMapOvr>
+</p:notes>
+</file>
+
+<file path=ppt/notesSlides/notesSlide5.xml><?xml version="1.0" encoding="utf-8"?>
+<p:notes xmlns:a="http://schemas.openxmlformats.org/drawingml/2006/main" xmlns:p="http://schemas.openxmlformats.org/presentationml/2006/main" xmlns:r="http://schemas.openxmlformats.org/officeDocument/2006/relationships">
+  <p:cSld>
+    <p:spTree>
+      <p:nvGrpSpPr>
+        <p:cNvPr id="1" name=""/>
+        <p:cNvGrpSpPr/>
+        <p:nvPr/>
+      </p:nvGrpSpPr>
+      <p:grpSpPr>
+        <a:xfrm>
+          <a:off x="0" y="0"/>
+          <a:ext cx="0" cy="0"/>
+          <a:chOff x="0" y="0"/>
+          <a:chExt cx="0" cy="0"/>
+        </a:xfrm>
+      </p:grpSpPr>
+      <p:sp>
+        <p:nvSpPr>
+          <p:cNvPr id="2" name="讲课提示"/>
+          <p:cNvSpPr txBox="1"/>
+          <p:nvPr/>
+        </p:nvSpPr>
+        <p:spPr>
+          <a:xfrm>
+            <a:off x="457200" y="457200"/>
+            <a:ext cx="6858000" cy="4800600"/>
+          </a:xfrm>
+          <a:prstGeom prst="rect">
+            <a:avLst/>
+          </a:prstGeom>
+        </p:spPr>
+        <p:txBody>
+          <a:bodyPr wrap="square"/>
+          <a:lstStyle/>
+          <a:p>
+            <a:r>
+              <a:rPr lang="zh-CN" dirty="0"/>
+              <a:t>第 11 节 · 核心知识点：增删改查、引用共享与排序</a:t>
+            </a:r>
+          </a:p>
+          <a:p>
+            <a:r>
+              <a:rPr lang="zh-CN" dirty="0"/>
+              <a:t/>
+            </a:r>
+          </a:p>
+          <a:p>
+            <a:r>
+              <a:rPr lang="zh-CN" dirty="0"/>
+              <a:t>讲这一页时：先让学生说出上节课的结论，再逐块讲要点。</a:t>
+            </a:r>
+          </a:p>
+          <a:p>
+            <a:r>
+              <a:rPr lang="zh-CN" dirty="0"/>
+              <a:t>每讲完一块，问一句「这一步如果写错了，报错会长什么样？」——把错误提前讲。</a:t>
+            </a:r>
+          </a:p>
+          <a:p>
+            <a:r>
+              <a:rPr lang="zh-CN" dirty="0"/>
+              <a:t/>
+            </a:r>
+          </a:p>
+          <a:p>
+            <a:r>
+              <a:rPr lang="zh-CN" dirty="0"/>
+              <a:t>本节目标：掌握五个增删改方法；理解引用共享——本单元最反直觉的一课</a:t>
+            </a:r>
+          </a:p>
+          <a:p>
+            <a:r>
+              <a:rPr lang="zh-CN" dirty="0"/>
+              <a:t/>
+            </a:r>
+          </a:p>
+          <a:p>
+            <a:r>
+              <a:rPr lang="zh-CN" dirty="0"/>
+              <a:t>看不到懂的地方，回讲义对应小节读一遍，再回来对着这页复述一次——能讲出来才算真懂。</a:t>
+            </a:r>
+          </a:p>
+        </p:txBody>
+      </p:sp>
+    </p:spTree>
+  </p:cSld>
+  <p:clrMapOvr>
+    <a:masterClrMapping/>
+  </p:clrMapOvr>
+</p:notes>
+</file>
+
+<file path=ppt/notesSlides/notesSlide6.xml><?xml version="1.0" encoding="utf-8"?>
+<p:notes xmlns:a="http://schemas.openxmlformats.org/drawingml/2006/main" xmlns:p="http://schemas.openxmlformats.org/presentationml/2006/main" xmlns:r="http://schemas.openxmlformats.org/officeDocument/2006/relationships">
+  <p:cSld>
+    <p:spTree>
+      <p:nvGrpSpPr>
+        <p:cNvPr id="1" name=""/>
+        <p:cNvGrpSpPr/>
+        <p:nvPr/>
+      </p:nvGrpSpPr>
+      <p:grpSpPr>
+        <a:xfrm>
+          <a:off x="0" y="0"/>
+          <a:ext cx="0" cy="0"/>
+          <a:chOff x="0" y="0"/>
+          <a:chExt cx="0" cy="0"/>
+        </a:xfrm>
+      </p:grpSpPr>
+      <p:sp>
+        <p:nvSpPr>
+          <p:cNvPr id="2" name="讲课提示"/>
+          <p:cNvSpPr txBox="1"/>
+          <p:nvPr/>
+        </p:nvSpPr>
+        <p:spPr>
+          <a:xfrm>
+            <a:off x="457200" y="457200"/>
+            <a:ext cx="6858000" cy="4800600"/>
+          </a:xfrm>
+          <a:prstGeom prst="rect">
+            <a:avLst/>
+          </a:prstGeom>
+        </p:spPr>
+        <p:txBody>
+          <a:bodyPr wrap="square"/>
+          <a:lstStyle/>
+          <a:p>
+            <a:r>
+              <a:rPr lang="zh-CN" dirty="0"/>
+              <a:t>第 12 节 · 动手实战与答案讲评</a:t>
+            </a:r>
+          </a:p>
+          <a:p>
+            <a:r>
+              <a:rPr lang="zh-CN" dirty="0"/>
+              <a:t>单元 2 · 列表简介 · W2</a:t>
+            </a:r>
+          </a:p>
+          <a:p>
+            <a:r>
+              <a:rPr lang="zh-CN" dirty="0"/>
+              <a:t/>
+            </a:r>
+          </a:p>
+          <a:p>
+            <a:r>
+              <a:rPr lang="zh-CN" dirty="0"/>
+              <a:t>学习目标：独立完成单元 2 练习，能预测任意列表操作的结果</a:t>
+            </a:r>
+          </a:p>
+          <a:p>
+            <a:r>
+              <a:rPr lang="zh-CN" dirty="0"/>
+              <a:t/>
+            </a:r>
+          </a:p>
+          <a:p>
+            <a:r>
+              <a:rPr lang="zh-CN" dirty="0"/>
+              <a:t>课堂实操（40 分钟，不看答案）：</a:t>
+            </a:r>
+          </a:p>
+          <a:p>
+            <a:r>
+              <a:rPr lang="zh-CN" dirty="0"/>
+              <a:t>· 限时 25 分钟独立完成基础档</a:t>
+            </a:r>
+          </a:p>
+          <a:p>
+            <a:r>
+              <a:rPr lang="zh-CN" dirty="0"/>
+              <a:t>· 逐题对照答案，错的当场重跑</a:t>
+            </a:r>
+          </a:p>
+          <a:p>
+            <a:r>
+              <a:rPr lang="zh-CN" dirty="0"/>
+              <a:t/>
+            </a:r>
+          </a:p>
+          <a:p>
+            <a:r>
+              <a:rPr lang="zh-CN" dirty="0"/>
+              <a:t>课后作业：</a:t>
+            </a:r>
+          </a:p>
+          <a:p>
+            <a:r>
+              <a:rPr lang="zh-CN" dirty="0"/>
+              <a:t>· 产出：能增删改查排序的清单脚本</a:t>
+            </a:r>
+          </a:p>
+          <a:p>
+            <a:r>
+              <a:rPr lang="zh-CN" dirty="0"/>
+              <a:t/>
+            </a:r>
+          </a:p>
+          <a:p>
+            <a:r>
+              <a:rPr lang="zh-CN" dirty="0"/>
+              <a:t>节奏：讲 20 分钟 → 学员自己敲 40 分钟（不看答案）→ 对讲评自查 20 分钟 → 写作业 10 分钟。</a:t>
+            </a:r>
+          </a:p>
+        </p:txBody>
+      </p:sp>
+    </p:spTree>
+  </p:cSld>
+  <p:clrMapOvr>
+    <a:masterClrMapping/>
+  </p:clrMapOvr>
+</p:notes>
+</file>
+
+<file path=ppt/notesSlides/notesSlide7.xml><?xml version="1.0" encoding="utf-8"?>
+<p:notes xmlns:a="http://schemas.openxmlformats.org/drawingml/2006/main" xmlns:p="http://schemas.openxmlformats.org/presentationml/2006/main" xmlns:r="http://schemas.openxmlformats.org/officeDocument/2006/relationships">
+  <p:cSld>
+    <p:spTree>
+      <p:nvGrpSpPr>
+        <p:cNvPr id="1" name=""/>
+        <p:cNvGrpSpPr/>
+        <p:nvPr/>
+      </p:nvGrpSpPr>
+      <p:grpSpPr>
+        <a:xfrm>
+          <a:off x="0" y="0"/>
+          <a:ext cx="0" cy="0"/>
+          <a:chOff x="0" y="0"/>
+          <a:chExt cx="0" cy="0"/>
+        </a:xfrm>
+      </p:grpSpPr>
+      <p:sp>
+        <p:nvSpPr>
+          <p:cNvPr id="2" name="讲课提示"/>
+          <p:cNvSpPr txBox="1"/>
+          <p:nvPr/>
+        </p:nvSpPr>
+        <p:spPr>
+          <a:xfrm>
+            <a:off x="457200" y="457200"/>
+            <a:ext cx="6858000" cy="4800600"/>
+          </a:xfrm>
+          <a:prstGeom prst="rect">
+            <a:avLst/>
+          </a:prstGeom>
+        </p:spPr>
+        <p:txBody>
+          <a:bodyPr wrap="square"/>
+          <a:lstStyle/>
+          <a:p>
+            <a:r>
+              <a:rPr lang="zh-CN" dirty="0"/>
+              <a:t>第 12 节 · 核心知识点：动手实战与答案讲评</a:t>
+            </a:r>
+          </a:p>
+          <a:p>
+            <a:r>
+              <a:rPr lang="zh-CN" dirty="0"/>
+              <a:t/>
+            </a:r>
+          </a:p>
+          <a:p>
+            <a:r>
+              <a:rPr lang="zh-CN" dirty="0"/>
+              <a:t>讲这一页时：先让学生说出上节课的结论，再逐块讲要点。</a:t>
+            </a:r>
+          </a:p>
+          <a:p>
+            <a:r>
+              <a:rPr lang="zh-CN" dirty="0"/>
+              <a:t>每讲完一块，问一句「这一步如果写错了，报错会长什么样？」——把错误提前讲。</a:t>
+            </a:r>
+          </a:p>
+          <a:p>
+            <a:r>
+              <a:rPr lang="zh-CN" dirty="0"/>
+              <a:t/>
+            </a:r>
+          </a:p>
+          <a:p>
+            <a:r>
+              <a:rPr lang="zh-CN" dirty="0"/>
+              <a:t>本节目标：独立完成单元 2 练习，能预测任意列表操作的结果</a:t>
+            </a:r>
+          </a:p>
+          <a:p>
+            <a:r>
+              <a:rPr lang="zh-CN" dirty="0"/>
+              <a:t/>
+            </a:r>
+          </a:p>
+          <a:p>
+            <a:r>
+              <a:rPr lang="zh-CN" dirty="0"/>
+              <a:t>看不到懂的地方，回讲义对应小节读一遍，再回来对着这页复述一次——能讲出来才算真懂。</a:t>
+            </a:r>
+          </a:p>
+        </p:txBody>
+      </p:sp>
+    </p:spTree>
+  </p:cSld>
+  <p:clrMapOvr>
+    <a:masterClrMapping/>
+  </p:clrMapOvr>
+</p:notes>
+</file>
+
+<file path=ppt/notesSlides/notesSlide8.xml><?xml version="1.0" encoding="utf-8"?>
+<p:notes xmlns:a="http://schemas.openxmlformats.org/drawingml/2006/main" xmlns:p="http://schemas.openxmlformats.org/presentationml/2006/main" xmlns:r="http://schemas.openxmlformats.org/officeDocument/2006/relationships">
+  <p:cSld>
+    <p:spTree>
+      <p:nvGrpSpPr>
+        <p:cNvPr id="1" name=""/>
+        <p:cNvGrpSpPr/>
+        <p:nvPr/>
+      </p:nvGrpSpPr>
+      <p:grpSpPr>
+        <a:xfrm>
+          <a:off x="0" y="0"/>
+          <a:ext cx="0" cy="0"/>
+          <a:chOff x="0" y="0"/>
+          <a:chExt cx="0" cy="0"/>
+        </a:xfrm>
+      </p:grpSpPr>
+      <p:sp>
+        <p:nvSpPr>
+          <p:cNvPr id="2" name="讲课提示"/>
+          <p:cNvSpPr txBox="1"/>
+          <p:nvPr/>
+        </p:nvSpPr>
+        <p:spPr>
+          <a:xfrm>
+            <a:off x="457200" y="457200"/>
+            <a:ext cx="6858000" cy="4800600"/>
+          </a:xfrm>
+          <a:prstGeom prst="rect">
+            <a:avLst/>
+          </a:prstGeom>
+        </p:spPr>
+        <p:txBody>
+          <a:bodyPr wrap="square"/>
+          <a:lstStyle/>
+          <a:p>
+            <a:r>
+              <a:rPr lang="zh-CN" dirty="0"/>
+              <a:t>第 13 节 · 单元 2 验收复盘</a:t>
+            </a:r>
+          </a:p>
+          <a:p>
+            <a:r>
+              <a:rPr lang="zh-CN" dirty="0"/>
+              <a:t>单元 2 · 列表简介 · W2</a:t>
+            </a:r>
+          </a:p>
+          <a:p>
+            <a:r>
+              <a:rPr lang="zh-CN" dirty="0"/>
+              <a:t/>
+            </a:r>
+          </a:p>
+          <a:p>
+            <a:r>
+              <a:rPr lang="zh-CN" dirty="0"/>
+              <a:t>学习目标：确认增删改查、引用共享、排序都过关</a:t>
+            </a:r>
+          </a:p>
+          <a:p>
+            <a:r>
+              <a:rPr lang="zh-CN" dirty="0"/>
+              <a:t/>
+            </a:r>
+          </a:p>
+          <a:p>
+            <a:r>
+              <a:rPr lang="zh-CN" dirty="0"/>
+              <a:t>课堂实操（40 分钟，不看答案）：</a:t>
+            </a:r>
+          </a:p>
+          <a:p>
+            <a:r>
+              <a:rPr lang="zh-CN" dirty="0"/>
+              <a:t>· 逐条打勾验收自测</a:t>
+            </a:r>
+          </a:p>
+          <a:p>
+            <a:r>
+              <a:rPr lang="zh-CN" dirty="0"/>
+              <a:t>· 现场演示引用共享的坑</a:t>
+            </a:r>
+          </a:p>
+          <a:p>
+            <a:r>
+              <a:rPr lang="zh-CN" dirty="0"/>
+              <a:t/>
+            </a:r>
+          </a:p>
+          <a:p>
+            <a:r>
+              <a:rPr lang="zh-CN" dirty="0"/>
+              <a:t>课后作业：</a:t>
+            </a:r>
+          </a:p>
+          <a:p>
+            <a:r>
+              <a:rPr lang="zh-CN" dirty="0"/>
+              <a:t>· 完成本单元小结与产出检查</a:t>
+            </a:r>
+          </a:p>
+          <a:p>
+            <a:r>
+              <a:rPr lang="zh-CN" dirty="0"/>
+              <a:t/>
+            </a:r>
+          </a:p>
+          <a:p>
+            <a:r>
+              <a:rPr lang="zh-CN" dirty="0"/>
+              <a:t>节奏：讲 20 分钟 → 学员自己敲 40 分钟（不看答案）→ 对讲评自查 20 分钟 → 写作业 10 分钟。</a:t>
+            </a:r>
+          </a:p>
+        </p:txBody>
+      </p:sp>
+    </p:spTree>
+  </p:cSld>
+  <p:clrMapOvr>
+    <a:masterClrMapping/>
+  </p:clrMapOvr>
+</p:notes>
+</file>
+
+<file path=ppt/notesSlides/notesSlide9.xml><?xml version="1.0" encoding="utf-8"?>
+<p:notes xmlns:a="http://schemas.openxmlformats.org/drawingml/2006/main" xmlns:p="http://schemas.openxmlformats.org/presentationml/2006/main" xmlns:r="http://schemas.openxmlformats.org/officeDocument/2006/relationships">
+  <p:cSld>
+    <p:spTree>
+      <p:nvGrpSpPr>
+        <p:cNvPr id="1" name=""/>
+        <p:cNvGrpSpPr/>
+        <p:nvPr/>
+      </p:nvGrpSpPr>
+      <p:grpSpPr>
+        <a:xfrm>
+          <a:off x="0" y="0"/>
+          <a:ext cx="0" cy="0"/>
+          <a:chOff x="0" y="0"/>
+          <a:chExt cx="0" cy="0"/>
+        </a:xfrm>
+      </p:grpSpPr>
+      <p:sp>
+        <p:nvSpPr>
+          <p:cNvPr id="2" name="讲课提示"/>
+          <p:cNvSpPr txBox="1"/>
+          <p:nvPr/>
+        </p:nvSpPr>
+        <p:spPr>
+          <a:xfrm>
+            <a:off x="457200" y="457200"/>
+            <a:ext cx="6858000" cy="4800600"/>
+          </a:xfrm>
+          <a:prstGeom prst="rect">
+            <a:avLst/>
+          </a:prstGeom>
+        </p:spPr>
+        <p:txBody>
+          <a:bodyPr wrap="square"/>
+          <a:lstStyle/>
+          <a:p>
+            <a:r>
+              <a:rPr lang="zh-CN" dirty="0"/>
+              <a:t>第 13 节 · 核心知识点：单元 2 验收复盘</a:t>
+            </a:r>
+          </a:p>
+          <a:p>
+            <a:r>
+              <a:rPr lang="zh-CN" dirty="0"/>
+              <a:t/>
+            </a:r>
+          </a:p>
+          <a:p>
+            <a:r>
+              <a:rPr lang="zh-CN" dirty="0"/>
+              <a:t>讲这一页时：先让学生说出上节课的结论，再逐块讲要点。</a:t>
+            </a:r>
+          </a:p>
+          <a:p>
+            <a:r>
+              <a:rPr lang="zh-CN" dirty="0"/>
+              <a:t>每讲完一块，问一句「这一步如果写错了，报错会长什么样？」——把错误提前讲。</a:t>
+            </a:r>
+          </a:p>
+          <a:p>
+            <a:r>
+              <a:rPr lang="zh-CN" dirty="0"/>
+              <a:t/>
+            </a:r>
+          </a:p>
+          <a:p>
+            <a:r>
+              <a:rPr lang="zh-CN" dirty="0"/>
+              <a:t>本节目标：确认增删改查、引用共享、排序都过关</a:t>
+            </a:r>
+          </a:p>
+          <a:p>
+            <a:r>
+              <a:rPr lang="zh-CN" dirty="0"/>
+              <a:t/>
+            </a:r>
+          </a:p>
+          <a:p>
+            <a:r>
+              <a:rPr lang="zh-CN" dirty="0"/>
+              <a:t>看不到懂的地方，回讲义对应小节读一遍，再回来对着这页复述一次——能讲出来才算真懂。</a:t>
+            </a:r>
+          </a:p>
+        </p:txBody>
+      </p:sp>
+    </p:spTree>
+  </p:cSld>
+  <p:clrMapOvr>
+    <a:masterClrMapping/>
+  </p:clrMapOvr>
+</p:notes>
 </file>
 
 <file path=ppt/slideLayouts/slideLayout1.xml><?xml version="1.0" encoding="utf-8"?>
